--- a/Rule-Based Programming in PROLOG.pptx
+++ b/Rule-Based Programming in PROLOG.pptx
@@ -5,7 +5,7 @@
     <p:sldMasterId id="2147483648" r:id="rId1"/>
   </p:sldMasterIdLst>
   <p:notesMasterIdLst>
-    <p:notesMasterId r:id="rId34"/>
+    <p:notesMasterId r:id="rId33"/>
   </p:notesMasterIdLst>
   <p:sldIdLst>
     <p:sldId id="256" r:id="rId2"/>
@@ -27,19 +27,18 @@
     <p:sldId id="272" r:id="rId18"/>
     <p:sldId id="273" r:id="rId19"/>
     <p:sldId id="274" r:id="rId20"/>
-    <p:sldId id="275" r:id="rId21"/>
-    <p:sldId id="276" r:id="rId22"/>
-    <p:sldId id="277" r:id="rId23"/>
-    <p:sldId id="278" r:id="rId24"/>
-    <p:sldId id="279" r:id="rId25"/>
-    <p:sldId id="280" r:id="rId26"/>
-    <p:sldId id="281" r:id="rId27"/>
-    <p:sldId id="282" r:id="rId28"/>
-    <p:sldId id="283" r:id="rId29"/>
-    <p:sldId id="284" r:id="rId30"/>
-    <p:sldId id="285" r:id="rId31"/>
-    <p:sldId id="286" r:id="rId32"/>
-    <p:sldId id="287" r:id="rId33"/>
+    <p:sldId id="276" r:id="rId21"/>
+    <p:sldId id="277" r:id="rId22"/>
+    <p:sldId id="278" r:id="rId23"/>
+    <p:sldId id="279" r:id="rId24"/>
+    <p:sldId id="280" r:id="rId25"/>
+    <p:sldId id="281" r:id="rId26"/>
+    <p:sldId id="282" r:id="rId27"/>
+    <p:sldId id="283" r:id="rId28"/>
+    <p:sldId id="284" r:id="rId29"/>
+    <p:sldId id="285" r:id="rId30"/>
+    <p:sldId id="286" r:id="rId31"/>
+    <p:sldId id="287" r:id="rId32"/>
   </p:sldIdLst>
   <p:sldSz cx="12192000" cy="6858000"/>
   <p:notesSz cx="6858000" cy="12192000"/>
@@ -143,20 +142,12 @@
 </p:presentation>
 </file>
 
-<file path=ppt/revisionInfo.xml><?xml version="1.0" encoding="utf-8"?>
-<p1510:revInfo xmlns:a="http://schemas.openxmlformats.org/drawingml/2006/main" xmlns:r="http://schemas.openxmlformats.org/officeDocument/2006/relationships" xmlns:p1510="http://schemas.microsoft.com/office/powerpoint/2015/10/main">
-  <p1510:revLst>
-    <p1510:client id="{85E228F1-6DC2-4BFD-8347-4DF4679D8C22}" v="2" dt="2026-10-12T11:27:08.421"/>
-  </p1510:revLst>
-</p1510:revInfo>
-</file>
-
 <file path=ppt/changesInfos/changesInfo1.xml><?xml version="1.0" encoding="utf-8"?>
 <pc:chgInfo xmlns:a="http://schemas.openxmlformats.org/drawingml/2006/main" xmlns:r="http://schemas.openxmlformats.org/officeDocument/2006/relationships" xmlns:ac="http://schemas.microsoft.com/office/drawing/2013/main/command" xmlns:pc="http://schemas.microsoft.com/office/powerpoint/2013/main/command">
   <pc:docChgLst>
     <pc:chgData name="Tushar sachdeva" userId="16859d6e1ff090bf" providerId="LiveId" clId="{3E4064D8-8FB8-4336-9C63-6E8BBE6CCC81}"/>
-    <pc:docChg chg="custSel modSld">
-      <pc:chgData name="Tushar sachdeva" userId="16859d6e1ff090bf" providerId="LiveId" clId="{3E4064D8-8FB8-4336-9C63-6E8BBE6CCC81}" dt="2026-10-12T11:27:17.687" v="168" actId="5793"/>
+    <pc:docChg chg="custSel delSld modSld">
+      <pc:chgData name="Tushar sachdeva" userId="16859d6e1ff090bf" providerId="LiveId" clId="{3E4064D8-8FB8-4336-9C63-6E8BBE6CCC81}" dt="2026-10-23T05:39:51.096" v="169" actId="47"/>
       <pc:docMkLst>
         <pc:docMk/>
       </pc:docMkLst>
@@ -166,30 +157,6 @@
           <pc:docMk/>
           <pc:sldMk cId="0" sldId="256"/>
         </pc:sldMkLst>
-        <pc:spChg chg="del">
-          <ac:chgData name="Tushar sachdeva" userId="16859d6e1ff090bf" providerId="LiveId" clId="{3E4064D8-8FB8-4336-9C63-6E8BBE6CCC81}" dt="2026-10-12T04:09:20.949" v="0" actId="478"/>
-          <ac:spMkLst>
-            <pc:docMk/>
-            <pc:sldMk cId="0" sldId="256"/>
-            <ac:spMk id="6" creationId="{00000000-0000-0000-0000-000000000000}"/>
-          </ac:spMkLst>
-        </pc:spChg>
-        <pc:spChg chg="del">
-          <ac:chgData name="Tushar sachdeva" userId="16859d6e1ff090bf" providerId="LiveId" clId="{3E4064D8-8FB8-4336-9C63-6E8BBE6CCC81}" dt="2026-10-12T04:09:20.949" v="0" actId="478"/>
-          <ac:spMkLst>
-            <pc:docMk/>
-            <pc:sldMk cId="0" sldId="256"/>
-            <ac:spMk id="7" creationId="{00000000-0000-0000-0000-000000000000}"/>
-          </ac:spMkLst>
-        </pc:spChg>
-        <pc:spChg chg="del">
-          <ac:chgData name="Tushar sachdeva" userId="16859d6e1ff090bf" providerId="LiveId" clId="{3E4064D8-8FB8-4336-9C63-6E8BBE6CCC81}" dt="2026-10-12T04:09:20.949" v="0" actId="478"/>
-          <ac:spMkLst>
-            <pc:docMk/>
-            <pc:sldMk cId="0" sldId="256"/>
-            <ac:spMk id="8" creationId="{00000000-0000-0000-0000-000000000000}"/>
-          </ac:spMkLst>
-        </pc:spChg>
         <pc:spChg chg="mod">
           <ac:chgData name="Tushar sachdeva" userId="16859d6e1ff090bf" providerId="LiveId" clId="{3E4064D8-8FB8-4336-9C63-6E8BBE6CCC81}" dt="2026-10-12T04:09:44.911" v="52" actId="20577"/>
           <ac:spMkLst>
@@ -222,6 +189,13 @@
             <ac:spMk id="12" creationId="{00000000-0000-0000-0000-000000000000}"/>
           </ac:spMkLst>
         </pc:spChg>
+      </pc:sldChg>
+      <pc:sldChg chg="del">
+        <pc:chgData name="Tushar sachdeva" userId="16859d6e1ff090bf" providerId="LiveId" clId="{3E4064D8-8FB8-4336-9C63-6E8BBE6CCC81}" dt="2026-10-23T05:39:51.096" v="169" actId="47"/>
+        <pc:sldMkLst>
+          <pc:docMk/>
+          <pc:sldMk cId="0" sldId="275"/>
+        </pc:sldMkLst>
       </pc:sldChg>
       <pc:sldChg chg="modSp mod">
         <pc:chgData name="Tushar sachdeva" userId="16859d6e1ff090bf" providerId="LiveId" clId="{3E4064D8-8FB8-4336-9C63-6E8BBE6CCC81}" dt="2026-10-12T11:27:17.687" v="168" actId="5793"/>
@@ -1458,7 +1432,7 @@
           <a:p>
             <a:r>
               <a:rPr lang="en-US" dirty="0"/>
-              <a:t>There are two kinds of explanation. WHY is asked during a question: why do you need this? We print the rules waiting for that fact. HOW is asked after the answer: how did you get this? We print the proof tree with indentation, showing which rule gave each step and which facts came from the user.</a:t>
+              <a:t>Now the demo. We start Prolog with the animal file and type go. The first question is about hair, because the first rule it tries is cheetah, which needs carnivore, which needs mammal, which needs hair. When we type why, it shows that chain: r1, r5 and r9. Then we answer yes four times and it concludes cheetah. It only needed four questions.</a:t>
             </a:r>
           </a:p>
         </p:txBody>
@@ -1545,7 +1519,7 @@
           <a:p>
             <a:r>
               <a:rPr lang="en-US" dirty="0"/>
-              <a:t>Now the demo. We start Prolog with the animal file and type go. The first question is about hair, because the first rule it tries is cheetah, which needs carnivore, which needs mammal, which needs hair. When we type why, it shows that chain: r1, r5 and r9. Then we answer yes four times and it concludes cheetah. It only needed four questions.</a:t>
+              <a:t>After the answer, it prints the HOW explanation. Each indent is one level deeper in the proof. 'By rule' means it came from a rule, and 'you told me' means it came from the user. This is the same tree we saw on slide 10.</a:t>
             </a:r>
           </a:p>
         </p:txBody>
@@ -1632,7 +1606,7 @@
           <a:p>
             <a:r>
               <a:rPr lang="en-US" dirty="0"/>
-              <a:t>After the answer, it prints the HOW explanation. Each indent is one level deeper in the proof. 'By rule' means it came from a rule, and 'you told me' means it came from the user. This is the same tree we saw on slide 10.</a:t>
+              <a:t>Second run, a penguin. We say no to hair and no to milk. So it can't be a mammal, and cheetah, tiger, giraffe and zebra all fail without asking anything new. Then it tries ostrich, but the long neck answer is no, so that fails. Penguin reuses the earlier answers and only asks about swimming and colour. So seven questions in total.</a:t>
             </a:r>
           </a:p>
         </p:txBody>
@@ -1719,7 +1693,7 @@
           <a:p>
             <a:r>
               <a:rPr lang="en-US" dirty="0"/>
-              <a:t>Second run, a penguin. We say no to hair and no to milk. So it can't be a mammal, and cheetah, tiger, giraffe and zebra all fail without asking anything new. Then it tries ostrich, but the long neck answer is no, so that fails. Penguin reuses the earlier answers and only asks about swimming and colour. So seven questions in total.</a:t>
+              <a:t>Third run. We didn't change the engine at all. We only wrote a new knowledge base for fever and flu. With four yes answers, it concludes flu, and the HOW tree shows that rule m2 used the result of m1. This shows the same engine works for any domain. Of course, this is just for learning, not real medical advice.</a:t>
             </a:r>
           </a:p>
         </p:txBody>
@@ -1806,7 +1780,7 @@
           <a:p>
             <a:r>
               <a:rPr lang="en-US" dirty="0"/>
-              <a:t>Third run. We didn't change the engine at all. We only wrote a new knowledge base for fever and flu. With four yes answers, it concludes flu, and the HOW tree shows that rule m2 used the result of m1. This shows the same engine works for any domain. Of course, this is just for learning, not real medical advice.</a:t>
+              <a:t>Our first case study is MYCIN, from Stanford in the 1970s. It diagnosed blood infections and suggested antibiotics. It had about 450 rules, used backward chaining, asked the doctor for missing facts, and could answer why and how, just like our system. It also used certainty factors for uncertain evidence. In a 1979 study, its advice was rated as good as Stanford's experts. But it was never used in hospitals, because of legal and ethical issues and slow typing. The lesson: being accurate isn't enough. The system has to fit into real work.</a:t>
             </a:r>
           </a:p>
         </p:txBody>
@@ -1893,7 +1867,7 @@
           <a:p>
             <a:r>
               <a:rPr lang="en-US" dirty="0"/>
-              <a:t>Our first case study is MYCIN, from Stanford in the 1970s. It diagnosed blood infections and suggested antibiotics. It had about 450 rules, used backward chaining, asked the doctor for missing facts, and could answer why and how, just like our system. It also used certainty factors for uncertain evidence. In a 1979 study, its advice was rated as good as Stanford's experts. But it was never used in hospitals, because of legal and ethical issues and slow typing. The lesson: being accurate isn't enough. The system has to fit into real work.</a:t>
+              <a:t>Our second case study is fully in Prolog. In 1986, researchers at Imperial College, including Kowalski, converted the British Nationality Act into Prolog rules. You could ask if someone is a British citizen, and it would ask for missing details like place of birth and parents. Interestingly, writing the law as rules showed where the law itself was unclear. So executable rules can be tested, and they expose gaps in the original text.</a:t>
             </a:r>
           </a:p>
         </p:txBody>
@@ -1980,7 +1954,7 @@
           <a:p>
             <a:r>
               <a:rPr lang="en-US" dirty="0"/>
-              <a:t>Our second case study is fully in Prolog. In 1986, researchers at Imperial College, including Kowalski, converted the British Nationality Act into Prolog rules. You could ask if someone is a British citizen, and it would ask for missing details like place of birth and parents. Interestingly, writing the law as rules showed where the law itself was unclear. So executable rules can be tested, and they expose gaps in the original text.</a:t>
+              <a:t>Prolog is also used inside big systems. IBM Watson, which won Jeopardy in 2011, used Prolog rules to understand the questions, like finding what the question is asking about. NASA's Clarissa, used on the space station from 2005, was a voice assistant that read procedures to astronauts, and its language rules were written in Prolog. The lesson is that rules work well alongside machine learning, and they're easy to check, which matters when software has to be trusted.</a:t>
             </a:r>
           </a:p>
         </p:txBody>
@@ -2067,7 +2041,7 @@
           <a:p>
             <a:r>
               <a:rPr lang="en-US" dirty="0"/>
-              <a:t>Prolog is also used inside big systems. IBM Watson, which won Jeopardy in 2011, used Prolog rules to understand the questions, like finding what the question is asking about. NASA's Clarissa, used on the space station from 2005, was a voice assistant that read procedures to astronauts, and its language rules were written in Prolog. The lesson is that rules work well alongside machine learning, and they're easy to check, which matters when software has to be trusted.</a:t>
+              <a:t>Now the limitations. First, it's hard to get knowledge out of experts and into rules. Second, the system is brittle. If something isn't in the rules, it just fails; our system can't identify a lion. Third, simple rules can't handle uncertainty. Fourth, large rule bases are hard to maintain; XCON grew to thousands of rules. Fifth, questions come in a fixed order. And sixth, as Clancey pointed out, the explanations only repeat the rules. They can't say why a rule is correct.</a:t>
             </a:r>
           </a:p>
         </p:txBody>
@@ -2154,7 +2128,7 @@
           <a:p>
             <a:r>
               <a:rPr lang="en-US" dirty="0"/>
-              <a:t>Now the limitations. First, it's hard to get knowledge out of experts and into rules. Second, the system is brittle. If something isn't in the rules, it just fails; our system can't identify a lion. Third, simple rules can't handle uncertainty. Fourth, large rule bases are hard to maintain; XCON grew to thousands of rules. Fifth, questions come in a fixed order. And sixth, as Clancey pointed out, the explanations only repeat the rules. They can't say why a rule is correct.</a:t>
+              <a:t>Some problems are specific to Prolog. Because it searches depth first, a left-recursive rule like this one never ends. With a small stack limit, it stops with a stack error in a couple of seconds. If we just change the order, it works. So in Prolog, order matters. Also, negation as failure treats anything unproven as false, the cut can change the meaning if used carelessly, and the user has to remember the full stop when typing.</a:t>
             </a:r>
           </a:p>
         </p:txBody>
@@ -2241,7 +2215,7 @@
           <a:p>
             <a:r>
               <a:rPr lang="en-US" dirty="0"/>
-              <a:t>Some problems are specific to Prolog. Because it searches depth first, a left-recursive rule like this one never ends. With a small stack limit, it stops with a stack error in a couple of seconds. If we just change the order, it works. So in Prolog, order matters. Also, negation as failure treats anything unproven as false, the cut can change the meaning if used carelessly, and the user has to remember the full stop when typing.</a:t>
+              <a:t>To sum up. An IF-THEN rule is a Horn clause, so it maps directly to Prolog. Prolog runs rules by backward chaining. A good system asks only when needed and remembers the answers. Storing rules as data lets it explain why and how. Keeping knowledge separate let the same engine handle animals and flu. And real systems show both the strengths and the limits. Thank you. We're happy to take questions.</a:t>
             </a:r>
           </a:p>
         </p:txBody>
@@ -2415,7 +2389,7 @@
           <a:p>
             <a:r>
               <a:rPr lang="en-US" dirty="0"/>
-              <a:t>To sum up. An IF-THEN rule is a Horn clause, so it maps directly to Prolog. Prolog runs rules by backward chaining. A good system asks only when needed and remembers the answers. Storing rules as data lets it explain why and how. Keeping knowledge separate let the same engine handle animals and flu. And real systems show both the strengths and the limits. Thank you. We're happy to take questions.</a:t>
+              <a:t>These are the books we used, mainly Bratko for Prolog and Durkin for expert systems.</a:t>
             </a:r>
           </a:p>
         </p:txBody>
@@ -2502,7 +2476,7 @@
           <a:p>
             <a:r>
               <a:rPr lang="en-US" dirty="0"/>
-              <a:t>These are the books we used, mainly Bratko for Prolog and Durkin for expert systems.</a:t>
+              <a:t>And these are the papers behind our case studies. All our demos were run in SWI-Prolog.</a:t>
             </a:r>
           </a:p>
         </p:txBody>
@@ -2525,93 +2499,6 @@
             <a:fld id="{F7021451-1387-4CA6-816F-3879F97B5CBC}" type="slidenum">
               <a:rPr lang="en-US"/>
               <a:t>31</a:t>
-            </a:fld>
-            <a:endParaRPr lang="en-US"/>
-          </a:p>
-        </p:txBody>
-      </p:sp>
-    </p:spTree>
-    <p:extLst>
-      <p:ext uri="{BB962C8B-B14F-4D97-AF65-F5344CB8AC3E}">
-        <p14:creationId xmlns:p14="http://schemas.microsoft.com/office/powerpoint/2010/main" val="1024086991"/>
-      </p:ext>
-    </p:extLst>
-  </p:cSld>
-  <p:clrMapOvr>
-    <a:masterClrMapping/>
-  </p:clrMapOvr>
-</p:notes>
-</file>
-
-<file path=ppt/notesSlides/notesSlide32.xml><?xml version="1.0" encoding="utf-8"?>
-<p:notes xmlns:a="http://schemas.openxmlformats.org/drawingml/2006/main" xmlns:r="http://schemas.openxmlformats.org/officeDocument/2006/relationships" xmlns:p="http://schemas.openxmlformats.org/presentationml/2006/main">
-  <p:cSld>
-    <p:spTree>
-      <p:nvGrpSpPr>
-        <p:cNvPr id="1" name=""/>
-        <p:cNvGrpSpPr/>
-        <p:nvPr/>
-      </p:nvGrpSpPr>
-      <p:grpSpPr>
-        <a:xfrm>
-          <a:off x="0" y="0"/>
-          <a:ext cx="0" cy="0"/>
-          <a:chOff x="0" y="0"/>
-          <a:chExt cx="0" cy="0"/>
-        </a:xfrm>
-      </p:grpSpPr>
-      <p:sp>
-        <p:nvSpPr>
-          <p:cNvPr id="2" name="Slide Image Placeholder 1"/>
-          <p:cNvSpPr>
-            <a:spLocks noGrp="1" noRot="1" noChangeAspect="1"/>
-          </p:cNvSpPr>
-          <p:nvPr>
-            <p:ph type="sldImg"/>
-          </p:nvPr>
-        </p:nvSpPr>
-        <p:spPr/>
-      </p:sp>
-      <p:sp>
-        <p:nvSpPr>
-          <p:cNvPr id="3" name="Notes Placeholder 2"/>
-          <p:cNvSpPr>
-            <a:spLocks noGrp="1"/>
-          </p:cNvSpPr>
-          <p:nvPr>
-            <p:ph type="body" idx="1"/>
-          </p:nvPr>
-        </p:nvSpPr>
-        <p:spPr/>
-        <p:txBody>
-          <a:bodyPr/>
-          <a:lstStyle/>
-          <a:p>
-            <a:r>
-              <a:rPr lang="en-US" dirty="0"/>
-              <a:t>And these are the papers behind our case studies. All our demos were run in SWI-Prolog.</a:t>
-            </a:r>
-          </a:p>
-        </p:txBody>
-      </p:sp>
-      <p:sp>
-        <p:nvSpPr>
-          <p:cNvPr id="4" name="Slide Number Placeholder 3"/>
-          <p:cNvSpPr>
-            <a:spLocks noGrp="1"/>
-          </p:cNvSpPr>
-          <p:nvPr>
-            <p:ph type="sldNum" sz="quarter" idx="10"/>
-          </p:nvPr>
-        </p:nvSpPr>
-        <p:spPr/>
-        <p:txBody>
-          <a:bodyPr/>
-          <a:lstStyle/>
-          <a:p>
-            <a:fld id="{F7021451-1387-4CA6-816F-3879F97B5CBC}" type="slidenum">
-              <a:rPr lang="en-US"/>
-              <a:t>32</a:t>
             </a:fld>
             <a:endParaRPr lang="en-US"/>
           </a:p>
@@ -15806,889 +15693,6 @@
 
 <file path=ppt/slides/slide20.xml><?xml version="1.0" encoding="utf-8"?>
 <p:sld xmlns:a="http://schemas.openxmlformats.org/drawingml/2006/main" xmlns:r="http://schemas.openxmlformats.org/officeDocument/2006/relationships" xmlns:p="http://schemas.openxmlformats.org/presentationml/2006/main">
-  <p:cSld name="Slide 20">
-    <p:bg>
-      <p:bgPr>
-        <a:solidFill>
-          <a:srgbClr val="F8F8F6"/>
-        </a:solidFill>
-        <a:effectLst/>
-      </p:bgPr>
-    </p:bg>
-    <p:spTree>
-      <p:nvGrpSpPr>
-        <p:cNvPr id="1" name=""/>
-        <p:cNvGrpSpPr/>
-        <p:nvPr/>
-      </p:nvGrpSpPr>
-      <p:grpSpPr>
-        <a:xfrm>
-          <a:off x="0" y="0"/>
-          <a:ext cx="0" cy="0"/>
-          <a:chOff x="0" y="0"/>
-          <a:chExt cx="0" cy="0"/>
-        </a:xfrm>
-      </p:grpSpPr>
-      <p:sp>
-        <p:nvSpPr>
-          <p:cNvPr id="2" name="Text 0"/>
-          <p:cNvSpPr txBox="1"/>
-          <p:nvPr/>
-        </p:nvSpPr>
-        <p:spPr>
-          <a:xfrm>
-            <a:off x="812810" y="660380"/>
-            <a:ext cx="10566441" cy="228600"/>
-          </a:xfrm>
-          <a:prstGeom prst="rect">
-            <a:avLst/>
-          </a:prstGeom>
-          <a:noFill/>
-          <a:ln/>
-        </p:spPr>
-        <p:txBody>
-          <a:bodyPr wrap="square" lIns="0" tIns="0" rIns="0" bIns="0" rtlCol="0" anchor="t"/>
-          <a:lstStyle/>
-          <a:p>
-            <a:pPr marL="0" indent="0">
-              <a:buNone/>
-            </a:pPr>
-            <a:r>
-              <a:rPr lang="en-US" sz="1200" b="1" kern="0" spc="300" dirty="0">
-                <a:solidFill>
-                  <a:srgbClr val="A8441A"/>
-                </a:solidFill>
-                <a:latin typeface="Calibri" pitchFamily="34" charset="0"/>
-                <a:ea typeface="Calibri" pitchFamily="34" charset="-122"/>
-                <a:cs typeface="Calibri" pitchFamily="34" charset="-120"/>
-              </a:rPr>
-              <a:t>03 · BUILDING THE SYSTEM</a:t>
-            </a:r>
-            <a:endParaRPr lang="en-US" sz="1200" dirty="0"/>
-          </a:p>
-        </p:txBody>
-      </p:sp>
-      <p:sp>
-        <p:nvSpPr>
-          <p:cNvPr id="3" name="Text 1"/>
-          <p:cNvSpPr txBox="1"/>
-          <p:nvPr/>
-        </p:nvSpPr>
-        <p:spPr>
-          <a:xfrm>
-            <a:off x="812810" y="927110"/>
-            <a:ext cx="10566441" cy="533370"/>
-          </a:xfrm>
-          <a:prstGeom prst="rect">
-            <a:avLst/>
-          </a:prstGeom>
-          <a:noFill/>
-          <a:ln/>
-        </p:spPr>
-        <p:txBody>
-          <a:bodyPr wrap="square" lIns="0" tIns="0" rIns="0" bIns="0" rtlCol="0" anchor="ctr"/>
-          <a:lstStyle/>
-          <a:p>
-            <a:pPr marL="0" indent="0">
-              <a:buNone/>
-            </a:pPr>
-            <a:r>
-              <a:rPr lang="en-US" sz="3000" b="1" dirty="0">
-                <a:solidFill>
-                  <a:srgbClr val="1B2233"/>
-                </a:solidFill>
-                <a:latin typeface="Cambria" pitchFamily="34" charset="0"/>
-                <a:ea typeface="Cambria" pitchFamily="34" charset="-122"/>
-                <a:cs typeface="Cambria" pitchFamily="34" charset="-120"/>
-              </a:rPr>
-              <a:t>Explanation facility: WHY and HOW</a:t>
-            </a:r>
-            <a:endParaRPr lang="en-US" sz="3000" dirty="0"/>
-          </a:p>
-        </p:txBody>
-      </p:sp>
-      <p:sp>
-        <p:nvSpPr>
-          <p:cNvPr id="4" name="Text 2"/>
-          <p:cNvSpPr txBox="1"/>
-          <p:nvPr/>
-        </p:nvSpPr>
-        <p:spPr>
-          <a:xfrm>
-            <a:off x="812810" y="6197620"/>
-            <a:ext cx="9144000" cy="254020"/>
-          </a:xfrm>
-          <a:prstGeom prst="rect">
-            <a:avLst/>
-          </a:prstGeom>
-          <a:noFill/>
-          <a:ln/>
-        </p:spPr>
-        <p:txBody>
-          <a:bodyPr wrap="square" lIns="0" tIns="0" rIns="0" bIns="0" rtlCol="0" anchor="ctr"/>
-          <a:lstStyle/>
-          <a:p>
-            <a:pPr marL="0" indent="0">
-              <a:buNone/>
-            </a:pPr>
-            <a:r>
-              <a:rPr lang="en-US" sz="1200" dirty="0">
-                <a:solidFill>
-                  <a:srgbClr val="5F6573"/>
-                </a:solidFill>
-                <a:latin typeface="Calibri" pitchFamily="34" charset="0"/>
-                <a:ea typeface="Calibri" pitchFamily="34" charset="-122"/>
-                <a:cs typeface="Calibri" pitchFamily="34" charset="-120"/>
-              </a:rPr>
-              <a:t>Sources: Bratko (2012), Ch. 15; Durkin (1994)</a:t>
-            </a:r>
-            <a:endParaRPr lang="en-US" sz="1200" dirty="0"/>
-          </a:p>
-        </p:txBody>
-      </p:sp>
-      <p:sp>
-        <p:nvSpPr>
-          <p:cNvPr id="5" name="Text 3"/>
-          <p:cNvSpPr txBox="1"/>
-          <p:nvPr/>
-        </p:nvSpPr>
-        <p:spPr>
-          <a:xfrm>
-            <a:off x="10109241" y="6197620"/>
-            <a:ext cx="1270010" cy="254020"/>
-          </a:xfrm>
-          <a:prstGeom prst="rect">
-            <a:avLst/>
-          </a:prstGeom>
-          <a:noFill/>
-          <a:ln/>
-        </p:spPr>
-        <p:txBody>
-          <a:bodyPr wrap="square" lIns="0" tIns="0" rIns="0" bIns="0" rtlCol="0" anchor="ctr"/>
-          <a:lstStyle/>
-          <a:p>
-            <a:pPr marL="0" indent="0" algn="r">
-              <a:buNone/>
-            </a:pPr>
-            <a:r>
-              <a:rPr lang="en-US" sz="1200" dirty="0">
-                <a:solidFill>
-                  <a:srgbClr val="5F6573"/>
-                </a:solidFill>
-                <a:latin typeface="Calibri" pitchFamily="34" charset="0"/>
-                <a:ea typeface="Calibri" pitchFamily="34" charset="-122"/>
-                <a:cs typeface="Calibri" pitchFamily="34" charset="-120"/>
-              </a:rPr>
-              <a:t>20</a:t>
-            </a:r>
-            <a:endParaRPr lang="en-US" sz="1200" dirty="0"/>
-          </a:p>
-        </p:txBody>
-      </p:sp>
-      <p:sp>
-        <p:nvSpPr>
-          <p:cNvPr id="7" name="Shape 4"/>
-          <p:cNvSpPr/>
-          <p:nvPr/>
-        </p:nvSpPr>
-        <p:spPr>
-          <a:xfrm>
-            <a:off x="812810" y="1701790"/>
-            <a:ext cx="5181630" cy="1015990"/>
-          </a:xfrm>
-          <a:prstGeom prst="roundRect">
-            <a:avLst>
-              <a:gd name="adj" fmla="val 9000"/>
-            </a:avLst>
-          </a:prstGeom>
-          <a:solidFill>
-            <a:srgbClr val="F6E9E1"/>
-          </a:solidFill>
-          <a:ln/>
-        </p:spPr>
-      </p:sp>
-      <p:sp>
-        <p:nvSpPr>
-          <p:cNvPr id="8" name="Text 5"/>
-          <p:cNvSpPr txBox="1"/>
-          <p:nvPr/>
-        </p:nvSpPr>
-        <p:spPr>
-          <a:xfrm>
-            <a:off x="990570" y="1854220"/>
-            <a:ext cx="4851441" cy="304770"/>
-          </a:xfrm>
-          <a:prstGeom prst="rect">
-            <a:avLst/>
-          </a:prstGeom>
-          <a:noFill/>
-          <a:ln/>
-        </p:spPr>
-        <p:txBody>
-          <a:bodyPr wrap="square" lIns="0" tIns="0" rIns="0" bIns="0" rtlCol="0" anchor="t"/>
-          <a:lstStyle/>
-          <a:p>
-            <a:pPr marL="0" indent="0">
-              <a:buNone/>
-            </a:pPr>
-            <a:r>
-              <a:rPr lang="en-US" sz="1500" b="1" dirty="0">
-                <a:solidFill>
-                  <a:srgbClr val="1B2233"/>
-                </a:solidFill>
-                <a:latin typeface="Calibri" pitchFamily="34" charset="0"/>
-                <a:ea typeface="Calibri" pitchFamily="34" charset="-122"/>
-                <a:cs typeface="Calibri" pitchFamily="34" charset="-120"/>
-              </a:rPr>
-              <a:t>WHY? (during a question)</a:t>
-            </a:r>
-            <a:endParaRPr lang="en-US" sz="1500" dirty="0"/>
-          </a:p>
-        </p:txBody>
-      </p:sp>
-      <p:sp>
-        <p:nvSpPr>
-          <p:cNvPr id="9" name="Text 6"/>
-          <p:cNvSpPr txBox="1"/>
-          <p:nvPr/>
-        </p:nvSpPr>
-        <p:spPr>
-          <a:xfrm>
-            <a:off x="990570" y="2158990"/>
-            <a:ext cx="4826020" cy="457200"/>
-          </a:xfrm>
-          <a:prstGeom prst="rect">
-            <a:avLst/>
-          </a:prstGeom>
-          <a:noFill/>
-          <a:ln/>
-        </p:spPr>
-        <p:txBody>
-          <a:bodyPr wrap="square" lIns="0" tIns="0" rIns="0" bIns="0" rtlCol="0" anchor="t"/>
-          <a:lstStyle/>
-          <a:p>
-            <a:pPr marL="0" indent="0">
-              <a:lnSpc>
-                <a:spcPct val="110000"/>
-              </a:lnSpc>
-              <a:buNone/>
-            </a:pPr>
-            <a:r>
-              <a:rPr lang="en-US" sz="1200" dirty="0">
-                <a:solidFill>
-                  <a:srgbClr val="4A5264"/>
-                </a:solidFill>
-                <a:latin typeface="Calibri" pitchFamily="34" charset="0"/>
-                <a:ea typeface="Calibri" pitchFamily="34" charset="-122"/>
-                <a:cs typeface="Calibri" pitchFamily="34" charset="-120"/>
-              </a:rPr>
-              <a:t>"Why do you need this fact?" Show the rules waiting for it, innermost first: the Trace list.</a:t>
-            </a:r>
-            <a:endParaRPr lang="en-US" sz="1200" dirty="0"/>
-          </a:p>
-        </p:txBody>
-      </p:sp>
-      <p:sp>
-        <p:nvSpPr>
-          <p:cNvPr id="10" name="Shape 7"/>
-          <p:cNvSpPr/>
-          <p:nvPr/>
-        </p:nvSpPr>
-        <p:spPr>
-          <a:xfrm>
-            <a:off x="6197620" y="1701790"/>
-            <a:ext cx="5181630" cy="1015990"/>
-          </a:xfrm>
-          <a:prstGeom prst="roundRect">
-            <a:avLst>
-              <a:gd name="adj" fmla="val 9000"/>
-            </a:avLst>
-          </a:prstGeom>
-          <a:solidFill>
-            <a:srgbClr val="E6EDF7"/>
-          </a:solidFill>
-          <a:ln/>
-        </p:spPr>
-      </p:sp>
-      <p:sp>
-        <p:nvSpPr>
-          <p:cNvPr id="11" name="Text 8"/>
-          <p:cNvSpPr txBox="1"/>
-          <p:nvPr/>
-        </p:nvSpPr>
-        <p:spPr>
-          <a:xfrm>
-            <a:off x="6375380" y="1854220"/>
-            <a:ext cx="4851441" cy="304770"/>
-          </a:xfrm>
-          <a:prstGeom prst="rect">
-            <a:avLst/>
-          </a:prstGeom>
-          <a:noFill/>
-          <a:ln/>
-        </p:spPr>
-        <p:txBody>
-          <a:bodyPr wrap="square" lIns="0" tIns="0" rIns="0" bIns="0" rtlCol="0" anchor="t"/>
-          <a:lstStyle/>
-          <a:p>
-            <a:pPr marL="0" indent="0">
-              <a:buNone/>
-            </a:pPr>
-            <a:r>
-              <a:rPr lang="en-US" sz="1500" b="1" dirty="0">
-                <a:solidFill>
-                  <a:srgbClr val="1B2233"/>
-                </a:solidFill>
-                <a:latin typeface="Calibri" pitchFamily="34" charset="0"/>
-                <a:ea typeface="Calibri" pitchFamily="34" charset="-122"/>
-                <a:cs typeface="Calibri" pitchFamily="34" charset="-120"/>
-              </a:rPr>
-              <a:t>HOW? (after a conclusion)</a:t>
-            </a:r>
-            <a:endParaRPr lang="en-US" sz="1500" dirty="0"/>
-          </a:p>
-        </p:txBody>
-      </p:sp>
-      <p:sp>
-        <p:nvSpPr>
-          <p:cNvPr id="12" name="Text 9"/>
-          <p:cNvSpPr txBox="1"/>
-          <p:nvPr/>
-        </p:nvSpPr>
-        <p:spPr>
-          <a:xfrm>
-            <a:off x="6375380" y="2158990"/>
-            <a:ext cx="4826020" cy="457200"/>
-          </a:xfrm>
-          <a:prstGeom prst="rect">
-            <a:avLst/>
-          </a:prstGeom>
-          <a:noFill/>
-          <a:ln/>
-        </p:spPr>
-        <p:txBody>
-          <a:bodyPr wrap="square" lIns="0" tIns="0" rIns="0" bIns="0" rtlCol="0" anchor="t"/>
-          <a:lstStyle/>
-          <a:p>
-            <a:pPr marL="0" indent="0">
-              <a:lnSpc>
-                <a:spcPct val="110000"/>
-              </a:lnSpc>
-              <a:buNone/>
-            </a:pPr>
-            <a:r>
-              <a:rPr lang="en-US" sz="1200" dirty="0">
-                <a:solidFill>
-                  <a:srgbClr val="4A5264"/>
-                </a:solidFill>
-                <a:latin typeface="Calibri" pitchFamily="34" charset="0"/>
-                <a:ea typeface="Calibri" pitchFamily="34" charset="-122"/>
-                <a:cs typeface="Calibri" pitchFamily="34" charset="-120"/>
-              </a:rPr>
-              <a:t>"How did you conclude that?" Print the proof tree: a rule for each conclusion, the user for each fact.</a:t>
-            </a:r>
-            <a:endParaRPr lang="en-US" sz="1200" dirty="0"/>
-          </a:p>
-        </p:txBody>
-      </p:sp>
-      <p:sp>
-        <p:nvSpPr>
-          <p:cNvPr id="13" name="Shape 10"/>
-          <p:cNvSpPr/>
-          <p:nvPr/>
-        </p:nvSpPr>
-        <p:spPr>
-          <a:xfrm>
-            <a:off x="812810" y="2870210"/>
-            <a:ext cx="5181630" cy="2654320"/>
-          </a:xfrm>
-          <a:prstGeom prst="roundRect">
-            <a:avLst>
-              <a:gd name="adj" fmla="val 3445"/>
-            </a:avLst>
-          </a:prstGeom>
-          <a:solidFill>
-            <a:srgbClr val="1E2433"/>
-          </a:solidFill>
-          <a:ln/>
-        </p:spPr>
-      </p:sp>
-      <p:sp>
-        <p:nvSpPr>
-          <p:cNvPr id="14" name="Text 11"/>
-          <p:cNvSpPr txBox="1"/>
-          <p:nvPr/>
-        </p:nvSpPr>
-        <p:spPr>
-          <a:xfrm>
-            <a:off x="990570" y="3022641"/>
-            <a:ext cx="4826020" cy="2349459"/>
-          </a:xfrm>
-          <a:prstGeom prst="rect">
-            <a:avLst/>
-          </a:prstGeom>
-          <a:noFill/>
-          <a:ln/>
-        </p:spPr>
-        <p:txBody>
-          <a:bodyPr wrap="square" lIns="0" tIns="0" rIns="0" bIns="0" rtlCol="0" anchor="t"/>
-          <a:lstStyle/>
-          <a:p>
-            <a:pPr marL="0" indent="0">
-              <a:lnSpc>
-                <a:spcPts val="1680"/>
-              </a:lnSpc>
-              <a:buNone/>
-            </a:pPr>
-            <a:r>
-              <a:rPr lang="en-US" sz="1200" dirty="0">
-                <a:solidFill>
-                  <a:srgbClr val="E6E1D3"/>
-                </a:solidFill>
-                <a:latin typeface="Consolas" pitchFamily="34" charset="0"/>
-                <a:ea typeface="Consolas" pitchFamily="34" charset="-122"/>
-                <a:cs typeface="Consolas" pitchFamily="34" charset="-120"/>
-              </a:rPr>
-              <a:t>why([]).</a:t>
-            </a:r>
-            <a:endParaRPr lang="en-US" sz="1200" dirty="0"/>
-          </a:p>
-          <a:p>
-            <a:pPr marL="0" indent="0">
-              <a:lnSpc>
-                <a:spcPts val="1680"/>
-              </a:lnSpc>
-              <a:buNone/>
-            </a:pPr>
-            <a:r>
-              <a:rPr lang="en-US" sz="1200" dirty="0">
-                <a:solidFill>
-                  <a:srgbClr val="E6E1D3"/>
-                </a:solidFill>
-                <a:latin typeface="Consolas" pitchFamily="34" charset="0"/>
-                <a:ea typeface="Consolas" pitchFamily="34" charset="-122"/>
-                <a:cs typeface="Consolas" pitchFamily="34" charset="-120"/>
-              </a:rPr>
-              <a:t>why([Id|Ids]) :-</a:t>
-            </a:r>
-            <a:endParaRPr lang="en-US" sz="1200" dirty="0"/>
-          </a:p>
-          <a:p>
-            <a:pPr marL="0" indent="0">
-              <a:lnSpc>
-                <a:spcPts val="1680"/>
-              </a:lnSpc>
-              <a:buNone/>
-            </a:pPr>
-            <a:r>
-              <a:rPr lang="en-US" sz="1200" dirty="0">
-                <a:solidFill>
-                  <a:srgbClr val="E6E1D3"/>
-                </a:solidFill>
-                <a:latin typeface="Consolas" pitchFamily="34" charset="0"/>
-                <a:ea typeface="Consolas" pitchFamily="34" charset="-122"/>
-                <a:cs typeface="Consolas" pitchFamily="34" charset="-120"/>
-              </a:rPr>
-              <a:t>    Id :: if C then G,</a:t>
-            </a:r>
-            <a:endParaRPr lang="en-US" sz="1200" dirty="0"/>
-          </a:p>
-          <a:p>
-            <a:pPr marL="0" indent="0">
-              <a:lnSpc>
-                <a:spcPts val="1680"/>
-              </a:lnSpc>
-              <a:buNone/>
-            </a:pPr>
-            <a:r>
-              <a:rPr lang="en-US" sz="1200" dirty="0">
-                <a:solidFill>
-                  <a:srgbClr val="E6E1D3"/>
-                </a:solidFill>
-                <a:latin typeface="Consolas" pitchFamily="34" charset="0"/>
-                <a:ea typeface="Consolas" pitchFamily="34" charset="-122"/>
-                <a:cs typeface="Consolas" pitchFamily="34" charset="-120"/>
-              </a:rPr>
-              <a:t>    format("   trying rule ~w: IF ", [Id]),</a:t>
-            </a:r>
-            <a:endParaRPr lang="en-US" sz="1200" dirty="0"/>
-          </a:p>
-          <a:p>
-            <a:pPr marL="0" indent="0">
-              <a:lnSpc>
-                <a:spcPts val="1680"/>
-              </a:lnSpc>
-              <a:buNone/>
-            </a:pPr>
-            <a:r>
-              <a:rPr lang="en-US" sz="1200" dirty="0">
-                <a:solidFill>
-                  <a:srgbClr val="E6E1D3"/>
-                </a:solidFill>
-                <a:latin typeface="Consolas" pitchFamily="34" charset="0"/>
-                <a:ea typeface="Consolas" pitchFamily="34" charset="-122"/>
-                <a:cs typeface="Consolas" pitchFamily="34" charset="-120"/>
-              </a:rPr>
-              <a:t>    show(C),</a:t>
-            </a:r>
-            <a:endParaRPr lang="en-US" sz="1200" dirty="0"/>
-          </a:p>
-          <a:p>
-            <a:pPr marL="0" indent="0">
-              <a:lnSpc>
-                <a:spcPts val="1680"/>
-              </a:lnSpc>
-              <a:buNone/>
-            </a:pPr>
-            <a:r>
-              <a:rPr lang="en-US" sz="1200" dirty="0">
-                <a:solidFill>
-                  <a:srgbClr val="E6E1D3"/>
-                </a:solidFill>
-                <a:latin typeface="Consolas" pitchFamily="34" charset="0"/>
-                <a:ea typeface="Consolas" pitchFamily="34" charset="-122"/>
-                <a:cs typeface="Consolas" pitchFamily="34" charset="-120"/>
-              </a:rPr>
-              <a:t>    format(" THEN ~w~n", [G]),</a:t>
-            </a:r>
-            <a:endParaRPr lang="en-US" sz="1200" dirty="0"/>
-          </a:p>
-          <a:p>
-            <a:pPr marL="0" indent="0">
-              <a:lnSpc>
-                <a:spcPts val="1680"/>
-              </a:lnSpc>
-              <a:buNone/>
-            </a:pPr>
-            <a:r>
-              <a:rPr lang="en-US" sz="1200" dirty="0">
-                <a:solidFill>
-                  <a:srgbClr val="E6E1D3"/>
-                </a:solidFill>
-                <a:latin typeface="Consolas" pitchFamily="34" charset="0"/>
-                <a:ea typeface="Consolas" pitchFamily="34" charset="-122"/>
-                <a:cs typeface="Consolas" pitchFamily="34" charset="-120"/>
-              </a:rPr>
-              <a:t>    why(Ids).</a:t>
-            </a:r>
-            <a:endParaRPr lang="en-US" sz="1200" dirty="0"/>
-          </a:p>
-          <a:p>
-            <a:pPr marL="0" indent="0">
-              <a:lnSpc>
-                <a:spcPts val="1680"/>
-              </a:lnSpc>
-              <a:buNone/>
-            </a:pPr>
-            <a:r>
-              <a:rPr lang="en-US" sz="1200" dirty="0">
-                <a:solidFill>
-                  <a:srgbClr val="E6E1D3"/>
-                </a:solidFill>
-                <a:latin typeface="Consolas" pitchFamily="34" charset="0"/>
-                <a:ea typeface="Consolas" pitchFamily="34" charset="-122"/>
-                <a:cs typeface="Consolas" pitchFamily="34" charset="-120"/>
-              </a:rPr>
-              <a:t> </a:t>
-            </a:r>
-            <a:endParaRPr lang="en-US" sz="1200" dirty="0"/>
-          </a:p>
-          <a:p>
-            <a:pPr marL="0" indent="0">
-              <a:lnSpc>
-                <a:spcPts val="1680"/>
-              </a:lnSpc>
-              <a:buNone/>
-            </a:pPr>
-            <a:r>
-              <a:rPr lang="en-US" sz="1200" dirty="0">
-                <a:solidFill>
-                  <a:srgbClr val="E6E1D3"/>
-                </a:solidFill>
-                <a:latin typeface="Consolas" pitchFamily="34" charset="0"/>
-                <a:ea typeface="Consolas" pitchFamily="34" charset="-122"/>
-                <a:cs typeface="Consolas" pitchFamily="34" charset="-120"/>
-              </a:rPr>
-              <a:t>show(A and B) :- !,</a:t>
-            </a:r>
-            <a:endParaRPr lang="en-US" sz="1200" dirty="0"/>
-          </a:p>
-          <a:p>
-            <a:pPr marL="0" indent="0">
-              <a:lnSpc>
-                <a:spcPts val="1680"/>
-              </a:lnSpc>
-              <a:buNone/>
-            </a:pPr>
-            <a:r>
-              <a:rPr lang="en-US" sz="1200" dirty="0">
-                <a:solidFill>
-                  <a:srgbClr val="E6E1D3"/>
-                </a:solidFill>
-                <a:latin typeface="Consolas" pitchFamily="34" charset="0"/>
-                <a:ea typeface="Consolas" pitchFamily="34" charset="-122"/>
-                <a:cs typeface="Consolas" pitchFamily="34" charset="-120"/>
-              </a:rPr>
-              <a:t>    show(A), write(' AND '), show(B).</a:t>
-            </a:r>
-            <a:endParaRPr lang="en-US" sz="1200" dirty="0"/>
-          </a:p>
-          <a:p>
-            <a:pPr marL="0" indent="0">
-              <a:lnSpc>
-                <a:spcPts val="1680"/>
-              </a:lnSpc>
-              <a:buNone/>
-            </a:pPr>
-            <a:r>
-              <a:rPr lang="en-US" sz="1200" dirty="0">
-                <a:solidFill>
-                  <a:srgbClr val="E6E1D3"/>
-                </a:solidFill>
-                <a:latin typeface="Consolas" pitchFamily="34" charset="0"/>
-                <a:ea typeface="Consolas" pitchFamily="34" charset="-122"/>
-                <a:cs typeface="Consolas" pitchFamily="34" charset="-120"/>
-              </a:rPr>
-              <a:t>show(X) :- write(X).</a:t>
-            </a:r>
-            <a:endParaRPr lang="en-US" sz="1200" dirty="0"/>
-          </a:p>
-        </p:txBody>
-      </p:sp>
-      <p:sp>
-        <p:nvSpPr>
-          <p:cNvPr id="15" name="Shape 12"/>
-          <p:cNvSpPr/>
-          <p:nvPr/>
-        </p:nvSpPr>
-        <p:spPr>
-          <a:xfrm>
-            <a:off x="6197620" y="2870210"/>
-            <a:ext cx="5181630" cy="2222541"/>
-          </a:xfrm>
-          <a:prstGeom prst="roundRect">
-            <a:avLst>
-              <a:gd name="adj" fmla="val 4114"/>
-            </a:avLst>
-          </a:prstGeom>
-          <a:solidFill>
-            <a:srgbClr val="1E2433"/>
-          </a:solidFill>
-          <a:ln/>
-        </p:spPr>
-      </p:sp>
-      <p:sp>
-        <p:nvSpPr>
-          <p:cNvPr id="16" name="Text 13"/>
-          <p:cNvSpPr txBox="1"/>
-          <p:nvPr/>
-        </p:nvSpPr>
-        <p:spPr>
-          <a:xfrm>
-            <a:off x="6375380" y="3022641"/>
-            <a:ext cx="4826020" cy="1917680"/>
-          </a:xfrm>
-          <a:prstGeom prst="rect">
-            <a:avLst/>
-          </a:prstGeom>
-          <a:noFill/>
-          <a:ln/>
-        </p:spPr>
-        <p:txBody>
-          <a:bodyPr wrap="square" lIns="0" tIns="0" rIns="0" bIns="0" rtlCol="0" anchor="t"/>
-          <a:lstStyle/>
-          <a:p>
-            <a:pPr marL="0" indent="0">
-              <a:lnSpc>
-                <a:spcPts val="1680"/>
-              </a:lnSpc>
-              <a:buNone/>
-            </a:pPr>
-            <a:r>
-              <a:rPr lang="en-US" sz="1200" dirty="0">
-                <a:solidFill>
-                  <a:srgbClr val="E6E1D3"/>
-                </a:solidFill>
-                <a:latin typeface="Consolas" pitchFamily="34" charset="0"/>
-                <a:ea typeface="Consolas" pitchFamily="34" charset="-122"/>
-                <a:cs typeface="Consolas" pitchFamily="34" charset="-120"/>
-              </a:rPr>
-              <a:t>how(A and B, D) :- !,</a:t>
-            </a:r>
-            <a:endParaRPr lang="en-US" sz="1200" dirty="0"/>
-          </a:p>
-          <a:p>
-            <a:pPr marL="0" indent="0">
-              <a:lnSpc>
-                <a:spcPts val="1680"/>
-              </a:lnSpc>
-              <a:buNone/>
-            </a:pPr>
-            <a:r>
-              <a:rPr lang="en-US" sz="1200" dirty="0">
-                <a:solidFill>
-                  <a:srgbClr val="E6E1D3"/>
-                </a:solidFill>
-                <a:latin typeface="Consolas" pitchFamily="34" charset="0"/>
-                <a:ea typeface="Consolas" pitchFamily="34" charset="-122"/>
-                <a:cs typeface="Consolas" pitchFamily="34" charset="-120"/>
-              </a:rPr>
-              <a:t>    how(A, D), how(B, D).</a:t>
-            </a:r>
-            <a:endParaRPr lang="en-US" sz="1200" dirty="0"/>
-          </a:p>
-          <a:p>
-            <a:pPr marL="0" indent="0">
-              <a:lnSpc>
-                <a:spcPts val="1680"/>
-              </a:lnSpc>
-              <a:buNone/>
-            </a:pPr>
-            <a:r>
-              <a:rPr lang="en-US" sz="1200" dirty="0">
-                <a:solidFill>
-                  <a:srgbClr val="E6E1D3"/>
-                </a:solidFill>
-                <a:latin typeface="Consolas" pitchFamily="34" charset="0"/>
-                <a:ea typeface="Consolas" pitchFamily="34" charset="-122"/>
-                <a:cs typeface="Consolas" pitchFamily="34" charset="-120"/>
-              </a:rPr>
-              <a:t>how(told(F), D) :- !, tab(D),</a:t>
-            </a:r>
-            <a:endParaRPr lang="en-US" sz="1200" dirty="0"/>
-          </a:p>
-          <a:p>
-            <a:pPr marL="0" indent="0">
-              <a:lnSpc>
-                <a:spcPts val="1680"/>
-              </a:lnSpc>
-              <a:buNone/>
-            </a:pPr>
-            <a:r>
-              <a:rPr lang="en-US" sz="1200" dirty="0">
-                <a:solidFill>
-                  <a:srgbClr val="E6E1D3"/>
-                </a:solidFill>
-                <a:latin typeface="Consolas" pitchFamily="34" charset="0"/>
-                <a:ea typeface="Consolas" pitchFamily="34" charset="-122"/>
-                <a:cs typeface="Consolas" pitchFamily="34" charset="-120"/>
-              </a:rPr>
-              <a:t>    format("~w  &lt;- you told me~n", [F]).</a:t>
-            </a:r>
-            <a:endParaRPr lang="en-US" sz="1200" dirty="0"/>
-          </a:p>
-          <a:p>
-            <a:pPr marL="0" indent="0">
-              <a:lnSpc>
-                <a:spcPts val="1680"/>
-              </a:lnSpc>
-              <a:buNone/>
-            </a:pPr>
-            <a:r>
-              <a:rPr lang="en-US" sz="1200" dirty="0">
-                <a:solidFill>
-                  <a:srgbClr val="E6E1D3"/>
-                </a:solidFill>
-                <a:latin typeface="Consolas" pitchFamily="34" charset="0"/>
-                <a:ea typeface="Consolas" pitchFamily="34" charset="-122"/>
-                <a:cs typeface="Consolas" pitchFamily="34" charset="-120"/>
-              </a:rPr>
-              <a:t>how(not(F), D) :- !, tab(D),</a:t>
-            </a:r>
-            <a:endParaRPr lang="en-US" sz="1200" dirty="0"/>
-          </a:p>
-          <a:p>
-            <a:pPr marL="0" indent="0">
-              <a:lnSpc>
-                <a:spcPts val="1680"/>
-              </a:lnSpc>
-              <a:buNone/>
-            </a:pPr>
-            <a:r>
-              <a:rPr lang="en-US" sz="1200" dirty="0">
-                <a:solidFill>
-                  <a:srgbClr val="E6E1D3"/>
-                </a:solidFill>
-                <a:latin typeface="Consolas" pitchFamily="34" charset="0"/>
-                <a:ea typeface="Consolas" pitchFamily="34" charset="-122"/>
-                <a:cs typeface="Consolas" pitchFamily="34" charset="-120"/>
-              </a:rPr>
-              <a:t>    format("not ~w  &lt;- you said no~n", [F]).</a:t>
-            </a:r>
-            <a:endParaRPr lang="en-US" sz="1200" dirty="0"/>
-          </a:p>
-          <a:p>
-            <a:pPr marL="0" indent="0">
-              <a:lnSpc>
-                <a:spcPts val="1680"/>
-              </a:lnSpc>
-              <a:buNone/>
-            </a:pPr>
-            <a:r>
-              <a:rPr lang="en-US" sz="1200" dirty="0">
-                <a:solidFill>
-                  <a:srgbClr val="E6E1D3"/>
-                </a:solidFill>
-                <a:latin typeface="Consolas" pitchFamily="34" charset="0"/>
-                <a:ea typeface="Consolas" pitchFamily="34" charset="-122"/>
-                <a:cs typeface="Consolas" pitchFamily="34" charset="-120"/>
-              </a:rPr>
-              <a:t>how(by(G, Id, P), D) :- tab(D),</a:t>
-            </a:r>
-            <a:endParaRPr lang="en-US" sz="1200" dirty="0"/>
-          </a:p>
-          <a:p>
-            <a:pPr marL="0" indent="0">
-              <a:lnSpc>
-                <a:spcPts val="1680"/>
-              </a:lnSpc>
-              <a:buNone/>
-            </a:pPr>
-            <a:r>
-              <a:rPr lang="en-US" sz="1200" dirty="0">
-                <a:solidFill>
-                  <a:srgbClr val="E6E1D3"/>
-                </a:solidFill>
-                <a:latin typeface="Consolas" pitchFamily="34" charset="0"/>
-                <a:ea typeface="Consolas" pitchFamily="34" charset="-122"/>
-                <a:cs typeface="Consolas" pitchFamily="34" charset="-120"/>
-              </a:rPr>
-              <a:t>    format("~w  &lt;- by rule ~w~n", [G, Id]),</a:t>
-            </a:r>
-            <a:endParaRPr lang="en-US" sz="1200" dirty="0"/>
-          </a:p>
-          <a:p>
-            <a:pPr marL="0" indent="0">
-              <a:lnSpc>
-                <a:spcPts val="1680"/>
-              </a:lnSpc>
-              <a:buNone/>
-            </a:pPr>
-            <a:r>
-              <a:rPr lang="en-US" sz="1200" dirty="0">
-                <a:solidFill>
-                  <a:srgbClr val="E6E1D3"/>
-                </a:solidFill>
-                <a:latin typeface="Consolas" pitchFamily="34" charset="0"/>
-                <a:ea typeface="Consolas" pitchFamily="34" charset="-122"/>
-                <a:cs typeface="Consolas" pitchFamily="34" charset="-120"/>
-              </a:rPr>
-              <a:t>    D1 is D + 4, how(P, D1).</a:t>
-            </a:r>
-            <a:endParaRPr lang="en-US" sz="1200" dirty="0"/>
-          </a:p>
-        </p:txBody>
-      </p:sp>
-    </p:spTree>
-  </p:cSld>
-  <p:clrMapOvr>
-    <a:masterClrMapping/>
-  </p:clrMapOvr>
-</p:sld>
-</file>
-
-<file path=ppt/slides/slide21.xml><?xml version="1.0" encoding="utf-8"?>
-<p:sld xmlns:a="http://schemas.openxmlformats.org/drawingml/2006/main" xmlns:r="http://schemas.openxmlformats.org/officeDocument/2006/relationships" xmlns:p="http://schemas.openxmlformats.org/presentationml/2006/main">
   <p:cSld name="Slide 21">
     <p:bg>
       <p:bgPr>
@@ -17501,7 +16505,7 @@
 </p:sld>
 </file>
 
-<file path=ppt/slides/slide22.xml><?xml version="1.0" encoding="utf-8"?>
+<file path=ppt/slides/slide21.xml><?xml version="1.0" encoding="utf-8"?>
 <p:sld xmlns:a="http://schemas.openxmlformats.org/drawingml/2006/main" xmlns:r="http://schemas.openxmlformats.org/officeDocument/2006/relationships" xmlns:p="http://schemas.openxmlformats.org/presentationml/2006/main">
   <p:cSld name="Slide 22">
     <p:bg>
@@ -18278,7 +17282,7 @@
 </p:sld>
 </file>
 
-<file path=ppt/slides/slide23.xml><?xml version="1.0" encoding="utf-8"?>
+<file path=ppt/slides/slide22.xml><?xml version="1.0" encoding="utf-8"?>
 <p:sld xmlns:a="http://schemas.openxmlformats.org/drawingml/2006/main" xmlns:r="http://schemas.openxmlformats.org/officeDocument/2006/relationships" xmlns:p="http://schemas.openxmlformats.org/presentationml/2006/main">
   <p:cSld name="Slide 23">
     <p:bg>
@@ -19292,7 +18296,7 @@
 </p:sld>
 </file>
 
-<file path=ppt/slides/slide24.xml><?xml version="1.0" encoding="utf-8"?>
+<file path=ppt/slides/slide23.xml><?xml version="1.0" encoding="utf-8"?>
 <p:sld xmlns:a="http://schemas.openxmlformats.org/drawingml/2006/main" xmlns:r="http://schemas.openxmlformats.org/officeDocument/2006/relationships" xmlns:p="http://schemas.openxmlformats.org/presentationml/2006/main">
   <p:cSld name="Slide 24">
     <p:bg>
@@ -20352,7 +19356,7 @@
 </p:sld>
 </file>
 
-<file path=ppt/slides/slide25.xml><?xml version="1.0" encoding="utf-8"?>
+<file path=ppt/slides/slide24.xml><?xml version="1.0" encoding="utf-8"?>
 <p:sld xmlns:a="http://schemas.openxmlformats.org/drawingml/2006/main" xmlns:r="http://schemas.openxmlformats.org/officeDocument/2006/relationships" xmlns:p="http://schemas.openxmlformats.org/presentationml/2006/main">
   <p:cSld name="Slide 25">
     <p:bg>
@@ -21016,7 +20020,7 @@
 </p:sld>
 </file>
 
-<file path=ppt/slides/slide26.xml><?xml version="1.0" encoding="utf-8"?>
+<file path=ppt/slides/slide25.xml><?xml version="1.0" encoding="utf-8"?>
 <p:sld xmlns:a="http://schemas.openxmlformats.org/drawingml/2006/main" xmlns:r="http://schemas.openxmlformats.org/officeDocument/2006/relationships" xmlns:p="http://schemas.openxmlformats.org/presentationml/2006/main">
   <p:cSld name="Slide 26">
     <p:bg>
@@ -21629,7 +20633,7 @@
 </p:sld>
 </file>
 
-<file path=ppt/slides/slide27.xml><?xml version="1.0" encoding="utf-8"?>
+<file path=ppt/slides/slide26.xml><?xml version="1.0" encoding="utf-8"?>
 <p:sld xmlns:a="http://schemas.openxmlformats.org/drawingml/2006/main" xmlns:r="http://schemas.openxmlformats.org/officeDocument/2006/relationships" xmlns:p="http://schemas.openxmlformats.org/presentationml/2006/main">
   <p:cSld name="Slide 27">
     <p:bg>
@@ -22358,7 +21362,7 @@
 </p:sld>
 </file>
 
-<file path=ppt/slides/slide28.xml><?xml version="1.0" encoding="utf-8"?>
+<file path=ppt/slides/slide27.xml><?xml version="1.0" encoding="utf-8"?>
 <p:sld xmlns:a="http://schemas.openxmlformats.org/drawingml/2006/main" xmlns:r="http://schemas.openxmlformats.org/officeDocument/2006/relationships" xmlns:p="http://schemas.openxmlformats.org/presentationml/2006/main">
   <p:cSld name="Slide 28">
     <p:bg>
@@ -23549,7 +22553,7 @@
 </p:sld>
 </file>
 
-<file path=ppt/slides/slide29.xml><?xml version="1.0" encoding="utf-8"?>
+<file path=ppt/slides/slide28.xml><?xml version="1.0" encoding="utf-8"?>
 <p:sld xmlns:a="http://schemas.openxmlformats.org/drawingml/2006/main" xmlns:r="http://schemas.openxmlformats.org/officeDocument/2006/relationships" xmlns:p="http://schemas.openxmlformats.org/presentationml/2006/main">
   <p:cSld name="Slide 29">
     <p:bg>
@@ -24292,6 +23296,924 @@
               <a:t>true .</a:t>
             </a:r>
             <a:endParaRPr lang="en-US" sz="1200" dirty="0"/>
+          </a:p>
+        </p:txBody>
+      </p:sp>
+    </p:spTree>
+  </p:cSld>
+  <p:clrMapOvr>
+    <a:masterClrMapping/>
+  </p:clrMapOvr>
+</p:sld>
+</file>
+
+<file path=ppt/slides/slide29.xml><?xml version="1.0" encoding="utf-8"?>
+<p:sld xmlns:a="http://schemas.openxmlformats.org/drawingml/2006/main" xmlns:r="http://schemas.openxmlformats.org/officeDocument/2006/relationships" xmlns:p="http://schemas.openxmlformats.org/presentationml/2006/main">
+  <p:cSld name="Slide 30">
+    <p:bg>
+      <p:bgPr>
+        <a:solidFill>
+          <a:srgbClr val="F8F8F6"/>
+        </a:solidFill>
+        <a:effectLst/>
+      </p:bgPr>
+    </p:bg>
+    <p:spTree>
+      <p:nvGrpSpPr>
+        <p:cNvPr id="1" name=""/>
+        <p:cNvGrpSpPr/>
+        <p:nvPr/>
+      </p:nvGrpSpPr>
+      <p:grpSpPr>
+        <a:xfrm>
+          <a:off x="0" y="0"/>
+          <a:ext cx="0" cy="0"/>
+          <a:chOff x="0" y="0"/>
+          <a:chExt cx="0" cy="0"/>
+        </a:xfrm>
+      </p:grpSpPr>
+      <p:sp>
+        <p:nvSpPr>
+          <p:cNvPr id="2" name="Text 0"/>
+          <p:cNvSpPr txBox="1"/>
+          <p:nvPr/>
+        </p:nvSpPr>
+        <p:spPr>
+          <a:xfrm>
+            <a:off x="812810" y="660380"/>
+            <a:ext cx="10566441" cy="228600"/>
+          </a:xfrm>
+          <a:prstGeom prst="rect">
+            <a:avLst/>
+          </a:prstGeom>
+          <a:noFill/>
+          <a:ln/>
+        </p:spPr>
+        <p:txBody>
+          <a:bodyPr wrap="square" lIns="0" tIns="0" rIns="0" bIns="0" rtlCol="0" anchor="t"/>
+          <a:lstStyle/>
+          <a:p>
+            <a:pPr marL="0" indent="0">
+              <a:buNone/>
+            </a:pPr>
+            <a:r>
+              <a:rPr lang="en-US" sz="1200" b="1" kern="0" spc="300" dirty="0">
+                <a:solidFill>
+                  <a:srgbClr val="A8441A"/>
+                </a:solidFill>
+                <a:latin typeface="Calibri" pitchFamily="34" charset="0"/>
+                <a:ea typeface="Calibri" pitchFamily="34" charset="-122"/>
+                <a:cs typeface="Calibri" pitchFamily="34" charset="-120"/>
+              </a:rPr>
+              <a:t>06 · SUMMARY</a:t>
+            </a:r>
+            <a:endParaRPr lang="en-US" sz="1200" dirty="0"/>
+          </a:p>
+        </p:txBody>
+      </p:sp>
+      <p:sp>
+        <p:nvSpPr>
+          <p:cNvPr id="3" name="Text 1"/>
+          <p:cNvSpPr txBox="1"/>
+          <p:nvPr/>
+        </p:nvSpPr>
+        <p:spPr>
+          <a:xfrm>
+            <a:off x="812810" y="927110"/>
+            <a:ext cx="10566441" cy="533370"/>
+          </a:xfrm>
+          <a:prstGeom prst="rect">
+            <a:avLst/>
+          </a:prstGeom>
+          <a:noFill/>
+          <a:ln/>
+        </p:spPr>
+        <p:txBody>
+          <a:bodyPr wrap="square" lIns="0" tIns="0" rIns="0" bIns="0" rtlCol="0" anchor="ctr"/>
+          <a:lstStyle/>
+          <a:p>
+            <a:pPr marL="0" indent="0">
+              <a:buNone/>
+            </a:pPr>
+            <a:r>
+              <a:rPr lang="en-US" sz="3000" b="1" dirty="0">
+                <a:solidFill>
+                  <a:srgbClr val="1B2233"/>
+                </a:solidFill>
+                <a:latin typeface="Cambria" pitchFamily="34" charset="0"/>
+                <a:ea typeface="Cambria" pitchFamily="34" charset="-122"/>
+                <a:cs typeface="Cambria" pitchFamily="34" charset="-120"/>
+              </a:rPr>
+              <a:t>Key takeaways</a:t>
+            </a:r>
+            <a:endParaRPr lang="en-US" sz="3000" dirty="0"/>
+          </a:p>
+        </p:txBody>
+      </p:sp>
+      <p:sp>
+        <p:nvSpPr>
+          <p:cNvPr id="4" name="Text 2"/>
+          <p:cNvSpPr txBox="1"/>
+          <p:nvPr/>
+        </p:nvSpPr>
+        <p:spPr>
+          <a:xfrm>
+            <a:off x="10109241" y="6197620"/>
+            <a:ext cx="1270010" cy="254020"/>
+          </a:xfrm>
+          <a:prstGeom prst="rect">
+            <a:avLst/>
+          </a:prstGeom>
+          <a:noFill/>
+          <a:ln/>
+        </p:spPr>
+        <p:txBody>
+          <a:bodyPr wrap="square" lIns="0" tIns="0" rIns="0" bIns="0" rtlCol="0" anchor="ctr"/>
+          <a:lstStyle/>
+          <a:p>
+            <a:pPr marL="0" indent="0" algn="r">
+              <a:buNone/>
+            </a:pPr>
+            <a:r>
+              <a:rPr lang="en-US" sz="1200" dirty="0">
+                <a:solidFill>
+                  <a:srgbClr val="5F6573"/>
+                </a:solidFill>
+                <a:latin typeface="Calibri" pitchFamily="34" charset="0"/>
+                <a:ea typeface="Calibri" pitchFamily="34" charset="-122"/>
+                <a:cs typeface="Calibri" pitchFamily="34" charset="-120"/>
+              </a:rPr>
+              <a:t>30</a:t>
+            </a:r>
+            <a:endParaRPr lang="en-US" sz="1200" dirty="0"/>
+          </a:p>
+        </p:txBody>
+      </p:sp>
+      <p:sp>
+        <p:nvSpPr>
+          <p:cNvPr id="6" name="Shape 3"/>
+          <p:cNvSpPr/>
+          <p:nvPr/>
+        </p:nvSpPr>
+        <p:spPr>
+          <a:xfrm>
+            <a:off x="812810" y="1701790"/>
+            <a:ext cx="5181630" cy="1155710"/>
+          </a:xfrm>
+          <a:prstGeom prst="roundRect">
+            <a:avLst>
+              <a:gd name="adj" fmla="val 7912"/>
+            </a:avLst>
+          </a:prstGeom>
+          <a:solidFill>
+            <a:srgbClr val="FFFFFF"/>
+          </a:solidFill>
+          <a:ln w="12700">
+            <a:solidFill>
+              <a:srgbClr val="E3E1DA"/>
+            </a:solidFill>
+            <a:prstDash val="solid"/>
+          </a:ln>
+        </p:spPr>
+      </p:sp>
+      <p:sp>
+        <p:nvSpPr>
+          <p:cNvPr id="7" name="Shape 4"/>
+          <p:cNvSpPr/>
+          <p:nvPr/>
+        </p:nvSpPr>
+        <p:spPr>
+          <a:xfrm>
+            <a:off x="1015990" y="2019270"/>
+            <a:ext cx="482620" cy="482620"/>
+          </a:xfrm>
+          <a:prstGeom prst="ellipse">
+            <a:avLst/>
+          </a:prstGeom>
+          <a:solidFill>
+            <a:srgbClr val="A8441A"/>
+          </a:solidFill>
+          <a:ln/>
+        </p:spPr>
+      </p:sp>
+      <p:sp>
+        <p:nvSpPr>
+          <p:cNvPr id="8" name="Text 5"/>
+          <p:cNvSpPr txBox="1"/>
+          <p:nvPr/>
+        </p:nvSpPr>
+        <p:spPr>
+          <a:xfrm>
+            <a:off x="1015990" y="2019270"/>
+            <a:ext cx="482620" cy="482620"/>
+          </a:xfrm>
+          <a:prstGeom prst="rect">
+            <a:avLst/>
+          </a:prstGeom>
+          <a:noFill/>
+          <a:ln/>
+        </p:spPr>
+        <p:txBody>
+          <a:bodyPr wrap="square" lIns="0" tIns="0" rIns="0" bIns="0" rtlCol="0" anchor="ctr"/>
+          <a:lstStyle/>
+          <a:p>
+            <a:pPr marL="0" indent="0" algn="ctr">
+              <a:buNone/>
+            </a:pPr>
+            <a:r>
+              <a:rPr lang="en-US" sz="2000" b="1" dirty="0">
+                <a:solidFill>
+                  <a:srgbClr val="FFFFFF"/>
+                </a:solidFill>
+                <a:latin typeface="Consolas" pitchFamily="34" charset="0"/>
+                <a:ea typeface="Consolas" pitchFamily="34" charset="-122"/>
+                <a:cs typeface="Consolas" pitchFamily="34" charset="-120"/>
+              </a:rPr>
+              <a:t>1</a:t>
+            </a:r>
+            <a:endParaRPr lang="en-US" sz="2000" dirty="0"/>
+          </a:p>
+        </p:txBody>
+      </p:sp>
+      <p:sp>
+        <p:nvSpPr>
+          <p:cNvPr id="9" name="Text 6"/>
+          <p:cNvSpPr txBox="1"/>
+          <p:nvPr/>
+        </p:nvSpPr>
+        <p:spPr>
+          <a:xfrm>
+            <a:off x="1701790" y="1701790"/>
+            <a:ext cx="4089380" cy="1155710"/>
+          </a:xfrm>
+          <a:prstGeom prst="rect">
+            <a:avLst/>
+          </a:prstGeom>
+          <a:noFill/>
+          <a:ln/>
+        </p:spPr>
+        <p:txBody>
+          <a:bodyPr wrap="square" lIns="0" tIns="0" rIns="0" bIns="0" rtlCol="0" anchor="ctr"/>
+          <a:lstStyle/>
+          <a:p>
+            <a:pPr marL="0" indent="0">
+              <a:lnSpc>
+                <a:spcPct val="115000"/>
+              </a:lnSpc>
+              <a:buNone/>
+            </a:pPr>
+            <a:r>
+              <a:rPr lang="en-US" sz="1500" dirty="0">
+                <a:solidFill>
+                  <a:srgbClr val="1B2233"/>
+                </a:solidFill>
+                <a:latin typeface="Calibri" pitchFamily="34" charset="0"/>
+                <a:ea typeface="Calibri" pitchFamily="34" charset="-122"/>
+                <a:cs typeface="Calibri" pitchFamily="34" charset="-120"/>
+              </a:rPr>
+              <a:t>An IF-THEN rule is a Horn clause: IF p AND q THEN r becomes r :- p, q.</a:t>
+            </a:r>
+            <a:endParaRPr lang="en-US" sz="1500" dirty="0"/>
+          </a:p>
+        </p:txBody>
+      </p:sp>
+      <p:sp>
+        <p:nvSpPr>
+          <p:cNvPr id="10" name="Shape 7"/>
+          <p:cNvSpPr/>
+          <p:nvPr/>
+        </p:nvSpPr>
+        <p:spPr>
+          <a:xfrm>
+            <a:off x="6197620" y="1701790"/>
+            <a:ext cx="5181630" cy="1155710"/>
+          </a:xfrm>
+          <a:prstGeom prst="roundRect">
+            <a:avLst>
+              <a:gd name="adj" fmla="val 7912"/>
+            </a:avLst>
+          </a:prstGeom>
+          <a:solidFill>
+            <a:srgbClr val="FFFFFF"/>
+          </a:solidFill>
+          <a:ln w="12700">
+            <a:solidFill>
+              <a:srgbClr val="E3E1DA"/>
+            </a:solidFill>
+            <a:prstDash val="solid"/>
+          </a:ln>
+        </p:spPr>
+      </p:sp>
+      <p:sp>
+        <p:nvSpPr>
+          <p:cNvPr id="11" name="Shape 8"/>
+          <p:cNvSpPr/>
+          <p:nvPr/>
+        </p:nvSpPr>
+        <p:spPr>
+          <a:xfrm>
+            <a:off x="6400800" y="2019270"/>
+            <a:ext cx="482620" cy="482620"/>
+          </a:xfrm>
+          <a:prstGeom prst="ellipse">
+            <a:avLst/>
+          </a:prstGeom>
+          <a:solidFill>
+            <a:srgbClr val="A8441A"/>
+          </a:solidFill>
+          <a:ln/>
+        </p:spPr>
+      </p:sp>
+      <p:sp>
+        <p:nvSpPr>
+          <p:cNvPr id="12" name="Text 9"/>
+          <p:cNvSpPr txBox="1"/>
+          <p:nvPr/>
+        </p:nvSpPr>
+        <p:spPr>
+          <a:xfrm>
+            <a:off x="6400800" y="2019270"/>
+            <a:ext cx="482620" cy="482620"/>
+          </a:xfrm>
+          <a:prstGeom prst="rect">
+            <a:avLst/>
+          </a:prstGeom>
+          <a:noFill/>
+          <a:ln/>
+        </p:spPr>
+        <p:txBody>
+          <a:bodyPr wrap="square" lIns="0" tIns="0" rIns="0" bIns="0" rtlCol="0" anchor="ctr"/>
+          <a:lstStyle/>
+          <a:p>
+            <a:pPr marL="0" indent="0" algn="ctr">
+              <a:buNone/>
+            </a:pPr>
+            <a:r>
+              <a:rPr lang="en-US" sz="2000" b="1" dirty="0">
+                <a:solidFill>
+                  <a:srgbClr val="FFFFFF"/>
+                </a:solidFill>
+                <a:latin typeface="Consolas" pitchFamily="34" charset="0"/>
+                <a:ea typeface="Consolas" pitchFamily="34" charset="-122"/>
+                <a:cs typeface="Consolas" pitchFamily="34" charset="-120"/>
+              </a:rPr>
+              <a:t>2</a:t>
+            </a:r>
+            <a:endParaRPr lang="en-US" sz="2000" dirty="0"/>
+          </a:p>
+        </p:txBody>
+      </p:sp>
+      <p:sp>
+        <p:nvSpPr>
+          <p:cNvPr id="13" name="Text 10"/>
+          <p:cNvSpPr txBox="1"/>
+          <p:nvPr/>
+        </p:nvSpPr>
+        <p:spPr>
+          <a:xfrm>
+            <a:off x="7086600" y="1701790"/>
+            <a:ext cx="4089380" cy="1155710"/>
+          </a:xfrm>
+          <a:prstGeom prst="rect">
+            <a:avLst/>
+          </a:prstGeom>
+          <a:noFill/>
+          <a:ln/>
+        </p:spPr>
+        <p:txBody>
+          <a:bodyPr wrap="square" lIns="0" tIns="0" rIns="0" bIns="0" rtlCol="0" anchor="ctr"/>
+          <a:lstStyle/>
+          <a:p>
+            <a:pPr marL="0" indent="0">
+              <a:lnSpc>
+                <a:spcPct val="115000"/>
+              </a:lnSpc>
+              <a:buNone/>
+            </a:pPr>
+            <a:r>
+              <a:rPr lang="en-US" sz="1500" dirty="0">
+                <a:solidFill>
+                  <a:srgbClr val="1B2233"/>
+                </a:solidFill>
+                <a:latin typeface="Calibri" pitchFamily="34" charset="0"/>
+                <a:ea typeface="Calibri" pitchFamily="34" charset="-122"/>
+                <a:cs typeface="Calibri" pitchFamily="34" charset="-120"/>
+              </a:rPr>
+              <a:t>Running a Prolog query is backward chaining: goal-driven, depth-first, with backtracking.</a:t>
+            </a:r>
+            <a:endParaRPr lang="en-US" sz="1500" dirty="0"/>
+          </a:p>
+        </p:txBody>
+      </p:sp>
+      <p:sp>
+        <p:nvSpPr>
+          <p:cNvPr id="14" name="Shape 11"/>
+          <p:cNvSpPr/>
+          <p:nvPr/>
+        </p:nvSpPr>
+        <p:spPr>
+          <a:xfrm>
+            <a:off x="812810" y="3009930"/>
+            <a:ext cx="5181630" cy="1155710"/>
+          </a:xfrm>
+          <a:prstGeom prst="roundRect">
+            <a:avLst>
+              <a:gd name="adj" fmla="val 7912"/>
+            </a:avLst>
+          </a:prstGeom>
+          <a:solidFill>
+            <a:srgbClr val="FFFFFF"/>
+          </a:solidFill>
+          <a:ln w="12700">
+            <a:solidFill>
+              <a:srgbClr val="E3E1DA"/>
+            </a:solidFill>
+            <a:prstDash val="solid"/>
+          </a:ln>
+        </p:spPr>
+      </p:sp>
+      <p:sp>
+        <p:nvSpPr>
+          <p:cNvPr id="15" name="Shape 12"/>
+          <p:cNvSpPr/>
+          <p:nvPr/>
+        </p:nvSpPr>
+        <p:spPr>
+          <a:xfrm>
+            <a:off x="1015990" y="3327410"/>
+            <a:ext cx="482620" cy="482620"/>
+          </a:xfrm>
+          <a:prstGeom prst="ellipse">
+            <a:avLst/>
+          </a:prstGeom>
+          <a:solidFill>
+            <a:srgbClr val="A8441A"/>
+          </a:solidFill>
+          <a:ln/>
+        </p:spPr>
+      </p:sp>
+      <p:sp>
+        <p:nvSpPr>
+          <p:cNvPr id="16" name="Text 13"/>
+          <p:cNvSpPr txBox="1"/>
+          <p:nvPr/>
+        </p:nvSpPr>
+        <p:spPr>
+          <a:xfrm>
+            <a:off x="1015990" y="3327410"/>
+            <a:ext cx="482620" cy="482620"/>
+          </a:xfrm>
+          <a:prstGeom prst="rect">
+            <a:avLst/>
+          </a:prstGeom>
+          <a:noFill/>
+          <a:ln/>
+        </p:spPr>
+        <p:txBody>
+          <a:bodyPr wrap="square" lIns="0" tIns="0" rIns="0" bIns="0" rtlCol="0" anchor="ctr"/>
+          <a:lstStyle/>
+          <a:p>
+            <a:pPr marL="0" indent="0" algn="ctr">
+              <a:buNone/>
+            </a:pPr>
+            <a:r>
+              <a:rPr lang="en-US" sz="2000" b="1" dirty="0">
+                <a:solidFill>
+                  <a:srgbClr val="FFFFFF"/>
+                </a:solidFill>
+                <a:latin typeface="Consolas" pitchFamily="34" charset="0"/>
+                <a:ea typeface="Consolas" pitchFamily="34" charset="-122"/>
+                <a:cs typeface="Consolas" pitchFamily="34" charset="-120"/>
+              </a:rPr>
+              <a:t>3</a:t>
+            </a:r>
+            <a:endParaRPr lang="en-US" sz="2000" dirty="0"/>
+          </a:p>
+        </p:txBody>
+      </p:sp>
+      <p:sp>
+        <p:nvSpPr>
+          <p:cNvPr id="17" name="Text 14"/>
+          <p:cNvSpPr txBox="1"/>
+          <p:nvPr/>
+        </p:nvSpPr>
+        <p:spPr>
+          <a:xfrm>
+            <a:off x="1701790" y="3009930"/>
+            <a:ext cx="4089380" cy="1155710"/>
+          </a:xfrm>
+          <a:prstGeom prst="rect">
+            <a:avLst/>
+          </a:prstGeom>
+          <a:noFill/>
+          <a:ln/>
+        </p:spPr>
+        <p:txBody>
+          <a:bodyPr wrap="square" lIns="0" tIns="0" rIns="0" bIns="0" rtlCol="0" anchor="ctr"/>
+          <a:lstStyle/>
+          <a:p>
+            <a:pPr marL="0" indent="0">
+              <a:lnSpc>
+                <a:spcPct val="115000"/>
+              </a:lnSpc>
+              <a:buNone/>
+            </a:pPr>
+            <a:r>
+              <a:rPr lang="en-US" sz="1500" dirty="0">
+                <a:solidFill>
+                  <a:srgbClr val="1B2233"/>
+                </a:solidFill>
+                <a:latin typeface="Calibri" pitchFamily="34" charset="0"/>
+                <a:ea typeface="Calibri" pitchFamily="34" charset="-122"/>
+                <a:cs typeface="Calibri" pitchFamily="34" charset="-120"/>
+              </a:rPr>
+              <a:t>Ask for leaf facts only when a rule needs them, and remember every answer.</a:t>
+            </a:r>
+            <a:endParaRPr lang="en-US" sz="1500" dirty="0"/>
+          </a:p>
+        </p:txBody>
+      </p:sp>
+      <p:sp>
+        <p:nvSpPr>
+          <p:cNvPr id="18" name="Shape 15"/>
+          <p:cNvSpPr/>
+          <p:nvPr/>
+        </p:nvSpPr>
+        <p:spPr>
+          <a:xfrm>
+            <a:off x="6197620" y="3009930"/>
+            <a:ext cx="5181630" cy="1155710"/>
+          </a:xfrm>
+          <a:prstGeom prst="roundRect">
+            <a:avLst>
+              <a:gd name="adj" fmla="val 7912"/>
+            </a:avLst>
+          </a:prstGeom>
+          <a:solidFill>
+            <a:srgbClr val="FFFFFF"/>
+          </a:solidFill>
+          <a:ln w="12700">
+            <a:solidFill>
+              <a:srgbClr val="E3E1DA"/>
+            </a:solidFill>
+            <a:prstDash val="solid"/>
+          </a:ln>
+        </p:spPr>
+      </p:sp>
+      <p:sp>
+        <p:nvSpPr>
+          <p:cNvPr id="19" name="Shape 16"/>
+          <p:cNvSpPr/>
+          <p:nvPr/>
+        </p:nvSpPr>
+        <p:spPr>
+          <a:xfrm>
+            <a:off x="6400800" y="3327410"/>
+            <a:ext cx="482620" cy="482620"/>
+          </a:xfrm>
+          <a:prstGeom prst="ellipse">
+            <a:avLst/>
+          </a:prstGeom>
+          <a:solidFill>
+            <a:srgbClr val="A8441A"/>
+          </a:solidFill>
+          <a:ln/>
+        </p:spPr>
+      </p:sp>
+      <p:sp>
+        <p:nvSpPr>
+          <p:cNvPr id="20" name="Text 17"/>
+          <p:cNvSpPr txBox="1"/>
+          <p:nvPr/>
+        </p:nvSpPr>
+        <p:spPr>
+          <a:xfrm>
+            <a:off x="6400800" y="3327410"/>
+            <a:ext cx="482620" cy="482620"/>
+          </a:xfrm>
+          <a:prstGeom prst="rect">
+            <a:avLst/>
+          </a:prstGeom>
+          <a:noFill/>
+          <a:ln/>
+        </p:spPr>
+        <p:txBody>
+          <a:bodyPr wrap="square" lIns="0" tIns="0" rIns="0" bIns="0" rtlCol="0" anchor="ctr"/>
+          <a:lstStyle/>
+          <a:p>
+            <a:pPr marL="0" indent="0" algn="ctr">
+              <a:buNone/>
+            </a:pPr>
+            <a:r>
+              <a:rPr lang="en-US" sz="2000" b="1" dirty="0">
+                <a:solidFill>
+                  <a:srgbClr val="FFFFFF"/>
+                </a:solidFill>
+                <a:latin typeface="Consolas" pitchFamily="34" charset="0"/>
+                <a:ea typeface="Consolas" pitchFamily="34" charset="-122"/>
+                <a:cs typeface="Consolas" pitchFamily="34" charset="-120"/>
+              </a:rPr>
+              <a:t>4</a:t>
+            </a:r>
+            <a:endParaRPr lang="en-US" sz="2000" dirty="0"/>
+          </a:p>
+        </p:txBody>
+      </p:sp>
+      <p:sp>
+        <p:nvSpPr>
+          <p:cNvPr id="21" name="Text 18"/>
+          <p:cNvSpPr txBox="1"/>
+          <p:nvPr/>
+        </p:nvSpPr>
+        <p:spPr>
+          <a:xfrm>
+            <a:off x="7086600" y="3009930"/>
+            <a:ext cx="4089380" cy="1155710"/>
+          </a:xfrm>
+          <a:prstGeom prst="rect">
+            <a:avLst/>
+          </a:prstGeom>
+          <a:noFill/>
+          <a:ln/>
+        </p:spPr>
+        <p:txBody>
+          <a:bodyPr wrap="square" lIns="0" tIns="0" rIns="0" bIns="0" rtlCol="0" anchor="ctr"/>
+          <a:lstStyle/>
+          <a:p>
+            <a:pPr marL="0" indent="0">
+              <a:lnSpc>
+                <a:spcPct val="115000"/>
+              </a:lnSpc>
+              <a:buNone/>
+            </a:pPr>
+            <a:r>
+              <a:rPr lang="en-US" sz="1500" dirty="0">
+                <a:solidFill>
+                  <a:srgbClr val="1B2233"/>
+                </a:solidFill>
+                <a:latin typeface="Calibri" pitchFamily="34" charset="0"/>
+                <a:ea typeface="Calibri" pitchFamily="34" charset="-122"/>
+                <a:cs typeface="Calibri" pitchFamily="34" charset="-120"/>
+              </a:rPr>
+              <a:t>Storing rules as data (Id :: if … then …) lets the engine explain WHY and HOW.</a:t>
+            </a:r>
+            <a:endParaRPr lang="en-US" sz="1500" dirty="0"/>
+          </a:p>
+        </p:txBody>
+      </p:sp>
+      <p:sp>
+        <p:nvSpPr>
+          <p:cNvPr id="22" name="Shape 19"/>
+          <p:cNvSpPr/>
+          <p:nvPr/>
+        </p:nvSpPr>
+        <p:spPr>
+          <a:xfrm>
+            <a:off x="812810" y="4317980"/>
+            <a:ext cx="5181630" cy="1155710"/>
+          </a:xfrm>
+          <a:prstGeom prst="roundRect">
+            <a:avLst>
+              <a:gd name="adj" fmla="val 7912"/>
+            </a:avLst>
+          </a:prstGeom>
+          <a:solidFill>
+            <a:srgbClr val="FFFFFF"/>
+          </a:solidFill>
+          <a:ln w="12700">
+            <a:solidFill>
+              <a:srgbClr val="E3E1DA"/>
+            </a:solidFill>
+            <a:prstDash val="solid"/>
+          </a:ln>
+        </p:spPr>
+      </p:sp>
+      <p:sp>
+        <p:nvSpPr>
+          <p:cNvPr id="23" name="Shape 20"/>
+          <p:cNvSpPr/>
+          <p:nvPr/>
+        </p:nvSpPr>
+        <p:spPr>
+          <a:xfrm>
+            <a:off x="1015990" y="4635459"/>
+            <a:ext cx="482620" cy="482620"/>
+          </a:xfrm>
+          <a:prstGeom prst="ellipse">
+            <a:avLst/>
+          </a:prstGeom>
+          <a:solidFill>
+            <a:srgbClr val="A8441A"/>
+          </a:solidFill>
+          <a:ln/>
+        </p:spPr>
+      </p:sp>
+      <p:sp>
+        <p:nvSpPr>
+          <p:cNvPr id="24" name="Text 21"/>
+          <p:cNvSpPr txBox="1"/>
+          <p:nvPr/>
+        </p:nvSpPr>
+        <p:spPr>
+          <a:xfrm>
+            <a:off x="1015990" y="4635459"/>
+            <a:ext cx="482620" cy="482620"/>
+          </a:xfrm>
+          <a:prstGeom prst="rect">
+            <a:avLst/>
+          </a:prstGeom>
+          <a:noFill/>
+          <a:ln/>
+        </p:spPr>
+        <p:txBody>
+          <a:bodyPr wrap="square" lIns="0" tIns="0" rIns="0" bIns="0" rtlCol="0" anchor="ctr"/>
+          <a:lstStyle/>
+          <a:p>
+            <a:pPr marL="0" indent="0" algn="ctr">
+              <a:buNone/>
+            </a:pPr>
+            <a:r>
+              <a:rPr lang="en-US" sz="2000" b="1" dirty="0">
+                <a:solidFill>
+                  <a:srgbClr val="FFFFFF"/>
+                </a:solidFill>
+                <a:latin typeface="Consolas" pitchFamily="34" charset="0"/>
+                <a:ea typeface="Consolas" pitchFamily="34" charset="-122"/>
+                <a:cs typeface="Consolas" pitchFamily="34" charset="-120"/>
+              </a:rPr>
+              <a:t>5</a:t>
+            </a:r>
+            <a:endParaRPr lang="en-US" sz="2000" dirty="0"/>
+          </a:p>
+        </p:txBody>
+      </p:sp>
+      <p:sp>
+        <p:nvSpPr>
+          <p:cNvPr id="25" name="Text 22"/>
+          <p:cNvSpPr txBox="1"/>
+          <p:nvPr/>
+        </p:nvSpPr>
+        <p:spPr>
+          <a:xfrm>
+            <a:off x="1701790" y="4317980"/>
+            <a:ext cx="4089380" cy="1155710"/>
+          </a:xfrm>
+          <a:prstGeom prst="rect">
+            <a:avLst/>
+          </a:prstGeom>
+          <a:noFill/>
+          <a:ln/>
+        </p:spPr>
+        <p:txBody>
+          <a:bodyPr wrap="square" lIns="0" tIns="0" rIns="0" bIns="0" rtlCol="0" anchor="ctr"/>
+          <a:lstStyle/>
+          <a:p>
+            <a:pPr marL="0" indent="0">
+              <a:lnSpc>
+                <a:spcPct val="115000"/>
+              </a:lnSpc>
+              <a:buNone/>
+            </a:pPr>
+            <a:r>
+              <a:rPr lang="en-US" sz="1500" dirty="0">
+                <a:solidFill>
+                  <a:srgbClr val="1B2233"/>
+                </a:solidFill>
+                <a:latin typeface="Calibri" pitchFamily="34" charset="0"/>
+                <a:ea typeface="Calibri" pitchFamily="34" charset="-122"/>
+                <a:cs typeface="Calibri" pitchFamily="34" charset="-120"/>
+              </a:rPr>
+              <a:t>Keep knowledge apart from inference: one engine ran both animals and fever / flu.</a:t>
+            </a:r>
+            <a:endParaRPr lang="en-US" sz="1500" dirty="0"/>
+          </a:p>
+        </p:txBody>
+      </p:sp>
+      <p:sp>
+        <p:nvSpPr>
+          <p:cNvPr id="26" name="Shape 23"/>
+          <p:cNvSpPr/>
+          <p:nvPr/>
+        </p:nvSpPr>
+        <p:spPr>
+          <a:xfrm>
+            <a:off x="6197620" y="4317980"/>
+            <a:ext cx="5181630" cy="1155710"/>
+          </a:xfrm>
+          <a:prstGeom prst="roundRect">
+            <a:avLst>
+              <a:gd name="adj" fmla="val 7912"/>
+            </a:avLst>
+          </a:prstGeom>
+          <a:solidFill>
+            <a:srgbClr val="FFFFFF"/>
+          </a:solidFill>
+          <a:ln w="12700">
+            <a:solidFill>
+              <a:srgbClr val="E3E1DA"/>
+            </a:solidFill>
+            <a:prstDash val="solid"/>
+          </a:ln>
+        </p:spPr>
+      </p:sp>
+      <p:sp>
+        <p:nvSpPr>
+          <p:cNvPr id="27" name="Shape 24"/>
+          <p:cNvSpPr/>
+          <p:nvPr/>
+        </p:nvSpPr>
+        <p:spPr>
+          <a:xfrm>
+            <a:off x="6400800" y="4635459"/>
+            <a:ext cx="482620" cy="482620"/>
+          </a:xfrm>
+          <a:prstGeom prst="ellipse">
+            <a:avLst/>
+          </a:prstGeom>
+          <a:solidFill>
+            <a:srgbClr val="A8441A"/>
+          </a:solidFill>
+          <a:ln/>
+        </p:spPr>
+      </p:sp>
+      <p:sp>
+        <p:nvSpPr>
+          <p:cNvPr id="28" name="Text 25"/>
+          <p:cNvSpPr txBox="1"/>
+          <p:nvPr/>
+        </p:nvSpPr>
+        <p:spPr>
+          <a:xfrm>
+            <a:off x="6400800" y="4635459"/>
+            <a:ext cx="482620" cy="482620"/>
+          </a:xfrm>
+          <a:prstGeom prst="rect">
+            <a:avLst/>
+          </a:prstGeom>
+          <a:noFill/>
+          <a:ln/>
+        </p:spPr>
+        <p:txBody>
+          <a:bodyPr wrap="square" lIns="0" tIns="0" rIns="0" bIns="0" rtlCol="0" anchor="ctr"/>
+          <a:lstStyle/>
+          <a:p>
+            <a:pPr marL="0" indent="0" algn="ctr">
+              <a:buNone/>
+            </a:pPr>
+            <a:r>
+              <a:rPr lang="en-US" sz="2000" b="1" dirty="0">
+                <a:solidFill>
+                  <a:srgbClr val="FFFFFF"/>
+                </a:solidFill>
+                <a:latin typeface="Consolas" pitchFamily="34" charset="0"/>
+                <a:ea typeface="Consolas" pitchFamily="34" charset="-122"/>
+                <a:cs typeface="Consolas" pitchFamily="34" charset="-120"/>
+              </a:rPr>
+              <a:t>6</a:t>
+            </a:r>
+            <a:endParaRPr lang="en-US" sz="2000" dirty="0"/>
+          </a:p>
+        </p:txBody>
+      </p:sp>
+      <p:sp>
+        <p:nvSpPr>
+          <p:cNvPr id="29" name="Text 26"/>
+          <p:cNvSpPr txBox="1"/>
+          <p:nvPr/>
+        </p:nvSpPr>
+        <p:spPr>
+          <a:xfrm>
+            <a:off x="7086600" y="4317980"/>
+            <a:ext cx="4089380" cy="1155710"/>
+          </a:xfrm>
+          <a:prstGeom prst="rect">
+            <a:avLst/>
+          </a:prstGeom>
+          <a:noFill/>
+          <a:ln/>
+        </p:spPr>
+        <p:txBody>
+          <a:bodyPr wrap="square" lIns="0" tIns="0" rIns="0" bIns="0" rtlCol="0" anchor="ctr"/>
+          <a:lstStyle/>
+          <a:p>
+            <a:pPr marL="0" indent="0">
+              <a:lnSpc>
+                <a:spcPct val="115000"/>
+              </a:lnSpc>
+              <a:buNone/>
+            </a:pPr>
+            <a:r>
+              <a:rPr lang="en-US" sz="1500" dirty="0">
+                <a:solidFill>
+                  <a:srgbClr val="1B2233"/>
+                </a:solidFill>
+                <a:latin typeface="Calibri" pitchFamily="34" charset="0"/>
+                <a:ea typeface="Calibri" pitchFamily="34" charset="-122"/>
+                <a:cs typeface="Calibri" pitchFamily="34" charset="-120"/>
+              </a:rPr>
+              <a:t>Real systems show the power and the limits: acquisition, uncertainty and upkeep.</a:t>
+            </a:r>
+            <a:endParaRPr lang="en-US" sz="1500" dirty="0"/>
           </a:p>
         </p:txBody>
       </p:sp>
@@ -25162,924 +25084,6 @@
 
 <file path=ppt/slides/slide30.xml><?xml version="1.0" encoding="utf-8"?>
 <p:sld xmlns:a="http://schemas.openxmlformats.org/drawingml/2006/main" xmlns:r="http://schemas.openxmlformats.org/officeDocument/2006/relationships" xmlns:p="http://schemas.openxmlformats.org/presentationml/2006/main">
-  <p:cSld name="Slide 30">
-    <p:bg>
-      <p:bgPr>
-        <a:solidFill>
-          <a:srgbClr val="F8F8F6"/>
-        </a:solidFill>
-        <a:effectLst/>
-      </p:bgPr>
-    </p:bg>
-    <p:spTree>
-      <p:nvGrpSpPr>
-        <p:cNvPr id="1" name=""/>
-        <p:cNvGrpSpPr/>
-        <p:nvPr/>
-      </p:nvGrpSpPr>
-      <p:grpSpPr>
-        <a:xfrm>
-          <a:off x="0" y="0"/>
-          <a:ext cx="0" cy="0"/>
-          <a:chOff x="0" y="0"/>
-          <a:chExt cx="0" cy="0"/>
-        </a:xfrm>
-      </p:grpSpPr>
-      <p:sp>
-        <p:nvSpPr>
-          <p:cNvPr id="2" name="Text 0"/>
-          <p:cNvSpPr txBox="1"/>
-          <p:nvPr/>
-        </p:nvSpPr>
-        <p:spPr>
-          <a:xfrm>
-            <a:off x="812810" y="660380"/>
-            <a:ext cx="10566441" cy="228600"/>
-          </a:xfrm>
-          <a:prstGeom prst="rect">
-            <a:avLst/>
-          </a:prstGeom>
-          <a:noFill/>
-          <a:ln/>
-        </p:spPr>
-        <p:txBody>
-          <a:bodyPr wrap="square" lIns="0" tIns="0" rIns="0" bIns="0" rtlCol="0" anchor="t"/>
-          <a:lstStyle/>
-          <a:p>
-            <a:pPr marL="0" indent="0">
-              <a:buNone/>
-            </a:pPr>
-            <a:r>
-              <a:rPr lang="en-US" sz="1200" b="1" kern="0" spc="300" dirty="0">
-                <a:solidFill>
-                  <a:srgbClr val="A8441A"/>
-                </a:solidFill>
-                <a:latin typeface="Calibri" pitchFamily="34" charset="0"/>
-                <a:ea typeface="Calibri" pitchFamily="34" charset="-122"/>
-                <a:cs typeface="Calibri" pitchFamily="34" charset="-120"/>
-              </a:rPr>
-              <a:t>06 · SUMMARY</a:t>
-            </a:r>
-            <a:endParaRPr lang="en-US" sz="1200" dirty="0"/>
-          </a:p>
-        </p:txBody>
-      </p:sp>
-      <p:sp>
-        <p:nvSpPr>
-          <p:cNvPr id="3" name="Text 1"/>
-          <p:cNvSpPr txBox="1"/>
-          <p:nvPr/>
-        </p:nvSpPr>
-        <p:spPr>
-          <a:xfrm>
-            <a:off x="812810" y="927110"/>
-            <a:ext cx="10566441" cy="533370"/>
-          </a:xfrm>
-          <a:prstGeom prst="rect">
-            <a:avLst/>
-          </a:prstGeom>
-          <a:noFill/>
-          <a:ln/>
-        </p:spPr>
-        <p:txBody>
-          <a:bodyPr wrap="square" lIns="0" tIns="0" rIns="0" bIns="0" rtlCol="0" anchor="ctr"/>
-          <a:lstStyle/>
-          <a:p>
-            <a:pPr marL="0" indent="0">
-              <a:buNone/>
-            </a:pPr>
-            <a:r>
-              <a:rPr lang="en-US" sz="3000" b="1" dirty="0">
-                <a:solidFill>
-                  <a:srgbClr val="1B2233"/>
-                </a:solidFill>
-                <a:latin typeface="Cambria" pitchFamily="34" charset="0"/>
-                <a:ea typeface="Cambria" pitchFamily="34" charset="-122"/>
-                <a:cs typeface="Cambria" pitchFamily="34" charset="-120"/>
-              </a:rPr>
-              <a:t>Key takeaways</a:t>
-            </a:r>
-            <a:endParaRPr lang="en-US" sz="3000" dirty="0"/>
-          </a:p>
-        </p:txBody>
-      </p:sp>
-      <p:sp>
-        <p:nvSpPr>
-          <p:cNvPr id="4" name="Text 2"/>
-          <p:cNvSpPr txBox="1"/>
-          <p:nvPr/>
-        </p:nvSpPr>
-        <p:spPr>
-          <a:xfrm>
-            <a:off x="10109241" y="6197620"/>
-            <a:ext cx="1270010" cy="254020"/>
-          </a:xfrm>
-          <a:prstGeom prst="rect">
-            <a:avLst/>
-          </a:prstGeom>
-          <a:noFill/>
-          <a:ln/>
-        </p:spPr>
-        <p:txBody>
-          <a:bodyPr wrap="square" lIns="0" tIns="0" rIns="0" bIns="0" rtlCol="0" anchor="ctr"/>
-          <a:lstStyle/>
-          <a:p>
-            <a:pPr marL="0" indent="0" algn="r">
-              <a:buNone/>
-            </a:pPr>
-            <a:r>
-              <a:rPr lang="en-US" sz="1200" dirty="0">
-                <a:solidFill>
-                  <a:srgbClr val="5F6573"/>
-                </a:solidFill>
-                <a:latin typeface="Calibri" pitchFamily="34" charset="0"/>
-                <a:ea typeface="Calibri" pitchFamily="34" charset="-122"/>
-                <a:cs typeface="Calibri" pitchFamily="34" charset="-120"/>
-              </a:rPr>
-              <a:t>30</a:t>
-            </a:r>
-            <a:endParaRPr lang="en-US" sz="1200" dirty="0"/>
-          </a:p>
-        </p:txBody>
-      </p:sp>
-      <p:sp>
-        <p:nvSpPr>
-          <p:cNvPr id="6" name="Shape 3"/>
-          <p:cNvSpPr/>
-          <p:nvPr/>
-        </p:nvSpPr>
-        <p:spPr>
-          <a:xfrm>
-            <a:off x="812810" y="1701790"/>
-            <a:ext cx="5181630" cy="1155710"/>
-          </a:xfrm>
-          <a:prstGeom prst="roundRect">
-            <a:avLst>
-              <a:gd name="adj" fmla="val 7912"/>
-            </a:avLst>
-          </a:prstGeom>
-          <a:solidFill>
-            <a:srgbClr val="FFFFFF"/>
-          </a:solidFill>
-          <a:ln w="12700">
-            <a:solidFill>
-              <a:srgbClr val="E3E1DA"/>
-            </a:solidFill>
-            <a:prstDash val="solid"/>
-          </a:ln>
-        </p:spPr>
-      </p:sp>
-      <p:sp>
-        <p:nvSpPr>
-          <p:cNvPr id="7" name="Shape 4"/>
-          <p:cNvSpPr/>
-          <p:nvPr/>
-        </p:nvSpPr>
-        <p:spPr>
-          <a:xfrm>
-            <a:off x="1015990" y="2019270"/>
-            <a:ext cx="482620" cy="482620"/>
-          </a:xfrm>
-          <a:prstGeom prst="ellipse">
-            <a:avLst/>
-          </a:prstGeom>
-          <a:solidFill>
-            <a:srgbClr val="A8441A"/>
-          </a:solidFill>
-          <a:ln/>
-        </p:spPr>
-      </p:sp>
-      <p:sp>
-        <p:nvSpPr>
-          <p:cNvPr id="8" name="Text 5"/>
-          <p:cNvSpPr txBox="1"/>
-          <p:nvPr/>
-        </p:nvSpPr>
-        <p:spPr>
-          <a:xfrm>
-            <a:off x="1015990" y="2019270"/>
-            <a:ext cx="482620" cy="482620"/>
-          </a:xfrm>
-          <a:prstGeom prst="rect">
-            <a:avLst/>
-          </a:prstGeom>
-          <a:noFill/>
-          <a:ln/>
-        </p:spPr>
-        <p:txBody>
-          <a:bodyPr wrap="square" lIns="0" tIns="0" rIns="0" bIns="0" rtlCol="0" anchor="ctr"/>
-          <a:lstStyle/>
-          <a:p>
-            <a:pPr marL="0" indent="0" algn="ctr">
-              <a:buNone/>
-            </a:pPr>
-            <a:r>
-              <a:rPr lang="en-US" sz="2000" b="1" dirty="0">
-                <a:solidFill>
-                  <a:srgbClr val="FFFFFF"/>
-                </a:solidFill>
-                <a:latin typeface="Consolas" pitchFamily="34" charset="0"/>
-                <a:ea typeface="Consolas" pitchFamily="34" charset="-122"/>
-                <a:cs typeface="Consolas" pitchFamily="34" charset="-120"/>
-              </a:rPr>
-              <a:t>1</a:t>
-            </a:r>
-            <a:endParaRPr lang="en-US" sz="2000" dirty="0"/>
-          </a:p>
-        </p:txBody>
-      </p:sp>
-      <p:sp>
-        <p:nvSpPr>
-          <p:cNvPr id="9" name="Text 6"/>
-          <p:cNvSpPr txBox="1"/>
-          <p:nvPr/>
-        </p:nvSpPr>
-        <p:spPr>
-          <a:xfrm>
-            <a:off x="1701790" y="1701790"/>
-            <a:ext cx="4089380" cy="1155710"/>
-          </a:xfrm>
-          <a:prstGeom prst="rect">
-            <a:avLst/>
-          </a:prstGeom>
-          <a:noFill/>
-          <a:ln/>
-        </p:spPr>
-        <p:txBody>
-          <a:bodyPr wrap="square" lIns="0" tIns="0" rIns="0" bIns="0" rtlCol="0" anchor="ctr"/>
-          <a:lstStyle/>
-          <a:p>
-            <a:pPr marL="0" indent="0">
-              <a:lnSpc>
-                <a:spcPct val="115000"/>
-              </a:lnSpc>
-              <a:buNone/>
-            </a:pPr>
-            <a:r>
-              <a:rPr lang="en-US" sz="1500" dirty="0">
-                <a:solidFill>
-                  <a:srgbClr val="1B2233"/>
-                </a:solidFill>
-                <a:latin typeface="Calibri" pitchFamily="34" charset="0"/>
-                <a:ea typeface="Calibri" pitchFamily="34" charset="-122"/>
-                <a:cs typeface="Calibri" pitchFamily="34" charset="-120"/>
-              </a:rPr>
-              <a:t>An IF-THEN rule is a Horn clause: IF p AND q THEN r becomes r :- p, q.</a:t>
-            </a:r>
-            <a:endParaRPr lang="en-US" sz="1500" dirty="0"/>
-          </a:p>
-        </p:txBody>
-      </p:sp>
-      <p:sp>
-        <p:nvSpPr>
-          <p:cNvPr id="10" name="Shape 7"/>
-          <p:cNvSpPr/>
-          <p:nvPr/>
-        </p:nvSpPr>
-        <p:spPr>
-          <a:xfrm>
-            <a:off x="6197620" y="1701790"/>
-            <a:ext cx="5181630" cy="1155710"/>
-          </a:xfrm>
-          <a:prstGeom prst="roundRect">
-            <a:avLst>
-              <a:gd name="adj" fmla="val 7912"/>
-            </a:avLst>
-          </a:prstGeom>
-          <a:solidFill>
-            <a:srgbClr val="FFFFFF"/>
-          </a:solidFill>
-          <a:ln w="12700">
-            <a:solidFill>
-              <a:srgbClr val="E3E1DA"/>
-            </a:solidFill>
-            <a:prstDash val="solid"/>
-          </a:ln>
-        </p:spPr>
-      </p:sp>
-      <p:sp>
-        <p:nvSpPr>
-          <p:cNvPr id="11" name="Shape 8"/>
-          <p:cNvSpPr/>
-          <p:nvPr/>
-        </p:nvSpPr>
-        <p:spPr>
-          <a:xfrm>
-            <a:off x="6400800" y="2019270"/>
-            <a:ext cx="482620" cy="482620"/>
-          </a:xfrm>
-          <a:prstGeom prst="ellipse">
-            <a:avLst/>
-          </a:prstGeom>
-          <a:solidFill>
-            <a:srgbClr val="A8441A"/>
-          </a:solidFill>
-          <a:ln/>
-        </p:spPr>
-      </p:sp>
-      <p:sp>
-        <p:nvSpPr>
-          <p:cNvPr id="12" name="Text 9"/>
-          <p:cNvSpPr txBox="1"/>
-          <p:nvPr/>
-        </p:nvSpPr>
-        <p:spPr>
-          <a:xfrm>
-            <a:off x="6400800" y="2019270"/>
-            <a:ext cx="482620" cy="482620"/>
-          </a:xfrm>
-          <a:prstGeom prst="rect">
-            <a:avLst/>
-          </a:prstGeom>
-          <a:noFill/>
-          <a:ln/>
-        </p:spPr>
-        <p:txBody>
-          <a:bodyPr wrap="square" lIns="0" tIns="0" rIns="0" bIns="0" rtlCol="0" anchor="ctr"/>
-          <a:lstStyle/>
-          <a:p>
-            <a:pPr marL="0" indent="0" algn="ctr">
-              <a:buNone/>
-            </a:pPr>
-            <a:r>
-              <a:rPr lang="en-US" sz="2000" b="1" dirty="0">
-                <a:solidFill>
-                  <a:srgbClr val="FFFFFF"/>
-                </a:solidFill>
-                <a:latin typeface="Consolas" pitchFamily="34" charset="0"/>
-                <a:ea typeface="Consolas" pitchFamily="34" charset="-122"/>
-                <a:cs typeface="Consolas" pitchFamily="34" charset="-120"/>
-              </a:rPr>
-              <a:t>2</a:t>
-            </a:r>
-            <a:endParaRPr lang="en-US" sz="2000" dirty="0"/>
-          </a:p>
-        </p:txBody>
-      </p:sp>
-      <p:sp>
-        <p:nvSpPr>
-          <p:cNvPr id="13" name="Text 10"/>
-          <p:cNvSpPr txBox="1"/>
-          <p:nvPr/>
-        </p:nvSpPr>
-        <p:spPr>
-          <a:xfrm>
-            <a:off x="7086600" y="1701790"/>
-            <a:ext cx="4089380" cy="1155710"/>
-          </a:xfrm>
-          <a:prstGeom prst="rect">
-            <a:avLst/>
-          </a:prstGeom>
-          <a:noFill/>
-          <a:ln/>
-        </p:spPr>
-        <p:txBody>
-          <a:bodyPr wrap="square" lIns="0" tIns="0" rIns="0" bIns="0" rtlCol="0" anchor="ctr"/>
-          <a:lstStyle/>
-          <a:p>
-            <a:pPr marL="0" indent="0">
-              <a:lnSpc>
-                <a:spcPct val="115000"/>
-              </a:lnSpc>
-              <a:buNone/>
-            </a:pPr>
-            <a:r>
-              <a:rPr lang="en-US" sz="1500" dirty="0">
-                <a:solidFill>
-                  <a:srgbClr val="1B2233"/>
-                </a:solidFill>
-                <a:latin typeface="Calibri" pitchFamily="34" charset="0"/>
-                <a:ea typeface="Calibri" pitchFamily="34" charset="-122"/>
-                <a:cs typeface="Calibri" pitchFamily="34" charset="-120"/>
-              </a:rPr>
-              <a:t>Running a Prolog query is backward chaining: goal-driven, depth-first, with backtracking.</a:t>
-            </a:r>
-            <a:endParaRPr lang="en-US" sz="1500" dirty="0"/>
-          </a:p>
-        </p:txBody>
-      </p:sp>
-      <p:sp>
-        <p:nvSpPr>
-          <p:cNvPr id="14" name="Shape 11"/>
-          <p:cNvSpPr/>
-          <p:nvPr/>
-        </p:nvSpPr>
-        <p:spPr>
-          <a:xfrm>
-            <a:off x="812810" y="3009930"/>
-            <a:ext cx="5181630" cy="1155710"/>
-          </a:xfrm>
-          <a:prstGeom prst="roundRect">
-            <a:avLst>
-              <a:gd name="adj" fmla="val 7912"/>
-            </a:avLst>
-          </a:prstGeom>
-          <a:solidFill>
-            <a:srgbClr val="FFFFFF"/>
-          </a:solidFill>
-          <a:ln w="12700">
-            <a:solidFill>
-              <a:srgbClr val="E3E1DA"/>
-            </a:solidFill>
-            <a:prstDash val="solid"/>
-          </a:ln>
-        </p:spPr>
-      </p:sp>
-      <p:sp>
-        <p:nvSpPr>
-          <p:cNvPr id="15" name="Shape 12"/>
-          <p:cNvSpPr/>
-          <p:nvPr/>
-        </p:nvSpPr>
-        <p:spPr>
-          <a:xfrm>
-            <a:off x="1015990" y="3327410"/>
-            <a:ext cx="482620" cy="482620"/>
-          </a:xfrm>
-          <a:prstGeom prst="ellipse">
-            <a:avLst/>
-          </a:prstGeom>
-          <a:solidFill>
-            <a:srgbClr val="A8441A"/>
-          </a:solidFill>
-          <a:ln/>
-        </p:spPr>
-      </p:sp>
-      <p:sp>
-        <p:nvSpPr>
-          <p:cNvPr id="16" name="Text 13"/>
-          <p:cNvSpPr txBox="1"/>
-          <p:nvPr/>
-        </p:nvSpPr>
-        <p:spPr>
-          <a:xfrm>
-            <a:off x="1015990" y="3327410"/>
-            <a:ext cx="482620" cy="482620"/>
-          </a:xfrm>
-          <a:prstGeom prst="rect">
-            <a:avLst/>
-          </a:prstGeom>
-          <a:noFill/>
-          <a:ln/>
-        </p:spPr>
-        <p:txBody>
-          <a:bodyPr wrap="square" lIns="0" tIns="0" rIns="0" bIns="0" rtlCol="0" anchor="ctr"/>
-          <a:lstStyle/>
-          <a:p>
-            <a:pPr marL="0" indent="0" algn="ctr">
-              <a:buNone/>
-            </a:pPr>
-            <a:r>
-              <a:rPr lang="en-US" sz="2000" b="1" dirty="0">
-                <a:solidFill>
-                  <a:srgbClr val="FFFFFF"/>
-                </a:solidFill>
-                <a:latin typeface="Consolas" pitchFamily="34" charset="0"/>
-                <a:ea typeface="Consolas" pitchFamily="34" charset="-122"/>
-                <a:cs typeface="Consolas" pitchFamily="34" charset="-120"/>
-              </a:rPr>
-              <a:t>3</a:t>
-            </a:r>
-            <a:endParaRPr lang="en-US" sz="2000" dirty="0"/>
-          </a:p>
-        </p:txBody>
-      </p:sp>
-      <p:sp>
-        <p:nvSpPr>
-          <p:cNvPr id="17" name="Text 14"/>
-          <p:cNvSpPr txBox="1"/>
-          <p:nvPr/>
-        </p:nvSpPr>
-        <p:spPr>
-          <a:xfrm>
-            <a:off x="1701790" y="3009930"/>
-            <a:ext cx="4089380" cy="1155710"/>
-          </a:xfrm>
-          <a:prstGeom prst="rect">
-            <a:avLst/>
-          </a:prstGeom>
-          <a:noFill/>
-          <a:ln/>
-        </p:spPr>
-        <p:txBody>
-          <a:bodyPr wrap="square" lIns="0" tIns="0" rIns="0" bIns="0" rtlCol="0" anchor="ctr"/>
-          <a:lstStyle/>
-          <a:p>
-            <a:pPr marL="0" indent="0">
-              <a:lnSpc>
-                <a:spcPct val="115000"/>
-              </a:lnSpc>
-              <a:buNone/>
-            </a:pPr>
-            <a:r>
-              <a:rPr lang="en-US" sz="1500" dirty="0">
-                <a:solidFill>
-                  <a:srgbClr val="1B2233"/>
-                </a:solidFill>
-                <a:latin typeface="Calibri" pitchFamily="34" charset="0"/>
-                <a:ea typeface="Calibri" pitchFamily="34" charset="-122"/>
-                <a:cs typeface="Calibri" pitchFamily="34" charset="-120"/>
-              </a:rPr>
-              <a:t>Ask for leaf facts only when a rule needs them, and remember every answer.</a:t>
-            </a:r>
-            <a:endParaRPr lang="en-US" sz="1500" dirty="0"/>
-          </a:p>
-        </p:txBody>
-      </p:sp>
-      <p:sp>
-        <p:nvSpPr>
-          <p:cNvPr id="18" name="Shape 15"/>
-          <p:cNvSpPr/>
-          <p:nvPr/>
-        </p:nvSpPr>
-        <p:spPr>
-          <a:xfrm>
-            <a:off x="6197620" y="3009930"/>
-            <a:ext cx="5181630" cy="1155710"/>
-          </a:xfrm>
-          <a:prstGeom prst="roundRect">
-            <a:avLst>
-              <a:gd name="adj" fmla="val 7912"/>
-            </a:avLst>
-          </a:prstGeom>
-          <a:solidFill>
-            <a:srgbClr val="FFFFFF"/>
-          </a:solidFill>
-          <a:ln w="12700">
-            <a:solidFill>
-              <a:srgbClr val="E3E1DA"/>
-            </a:solidFill>
-            <a:prstDash val="solid"/>
-          </a:ln>
-        </p:spPr>
-      </p:sp>
-      <p:sp>
-        <p:nvSpPr>
-          <p:cNvPr id="19" name="Shape 16"/>
-          <p:cNvSpPr/>
-          <p:nvPr/>
-        </p:nvSpPr>
-        <p:spPr>
-          <a:xfrm>
-            <a:off x="6400800" y="3327410"/>
-            <a:ext cx="482620" cy="482620"/>
-          </a:xfrm>
-          <a:prstGeom prst="ellipse">
-            <a:avLst/>
-          </a:prstGeom>
-          <a:solidFill>
-            <a:srgbClr val="A8441A"/>
-          </a:solidFill>
-          <a:ln/>
-        </p:spPr>
-      </p:sp>
-      <p:sp>
-        <p:nvSpPr>
-          <p:cNvPr id="20" name="Text 17"/>
-          <p:cNvSpPr txBox="1"/>
-          <p:nvPr/>
-        </p:nvSpPr>
-        <p:spPr>
-          <a:xfrm>
-            <a:off x="6400800" y="3327410"/>
-            <a:ext cx="482620" cy="482620"/>
-          </a:xfrm>
-          <a:prstGeom prst="rect">
-            <a:avLst/>
-          </a:prstGeom>
-          <a:noFill/>
-          <a:ln/>
-        </p:spPr>
-        <p:txBody>
-          <a:bodyPr wrap="square" lIns="0" tIns="0" rIns="0" bIns="0" rtlCol="0" anchor="ctr"/>
-          <a:lstStyle/>
-          <a:p>
-            <a:pPr marL="0" indent="0" algn="ctr">
-              <a:buNone/>
-            </a:pPr>
-            <a:r>
-              <a:rPr lang="en-US" sz="2000" b="1" dirty="0">
-                <a:solidFill>
-                  <a:srgbClr val="FFFFFF"/>
-                </a:solidFill>
-                <a:latin typeface="Consolas" pitchFamily="34" charset="0"/>
-                <a:ea typeface="Consolas" pitchFamily="34" charset="-122"/>
-                <a:cs typeface="Consolas" pitchFamily="34" charset="-120"/>
-              </a:rPr>
-              <a:t>4</a:t>
-            </a:r>
-            <a:endParaRPr lang="en-US" sz="2000" dirty="0"/>
-          </a:p>
-        </p:txBody>
-      </p:sp>
-      <p:sp>
-        <p:nvSpPr>
-          <p:cNvPr id="21" name="Text 18"/>
-          <p:cNvSpPr txBox="1"/>
-          <p:nvPr/>
-        </p:nvSpPr>
-        <p:spPr>
-          <a:xfrm>
-            <a:off x="7086600" y="3009930"/>
-            <a:ext cx="4089380" cy="1155710"/>
-          </a:xfrm>
-          <a:prstGeom prst="rect">
-            <a:avLst/>
-          </a:prstGeom>
-          <a:noFill/>
-          <a:ln/>
-        </p:spPr>
-        <p:txBody>
-          <a:bodyPr wrap="square" lIns="0" tIns="0" rIns="0" bIns="0" rtlCol="0" anchor="ctr"/>
-          <a:lstStyle/>
-          <a:p>
-            <a:pPr marL="0" indent="0">
-              <a:lnSpc>
-                <a:spcPct val="115000"/>
-              </a:lnSpc>
-              <a:buNone/>
-            </a:pPr>
-            <a:r>
-              <a:rPr lang="en-US" sz="1500" dirty="0">
-                <a:solidFill>
-                  <a:srgbClr val="1B2233"/>
-                </a:solidFill>
-                <a:latin typeface="Calibri" pitchFamily="34" charset="0"/>
-                <a:ea typeface="Calibri" pitchFamily="34" charset="-122"/>
-                <a:cs typeface="Calibri" pitchFamily="34" charset="-120"/>
-              </a:rPr>
-              <a:t>Storing rules as data (Id :: if … then …) lets the engine explain WHY and HOW.</a:t>
-            </a:r>
-            <a:endParaRPr lang="en-US" sz="1500" dirty="0"/>
-          </a:p>
-        </p:txBody>
-      </p:sp>
-      <p:sp>
-        <p:nvSpPr>
-          <p:cNvPr id="22" name="Shape 19"/>
-          <p:cNvSpPr/>
-          <p:nvPr/>
-        </p:nvSpPr>
-        <p:spPr>
-          <a:xfrm>
-            <a:off x="812810" y="4317980"/>
-            <a:ext cx="5181630" cy="1155710"/>
-          </a:xfrm>
-          <a:prstGeom prst="roundRect">
-            <a:avLst>
-              <a:gd name="adj" fmla="val 7912"/>
-            </a:avLst>
-          </a:prstGeom>
-          <a:solidFill>
-            <a:srgbClr val="FFFFFF"/>
-          </a:solidFill>
-          <a:ln w="12700">
-            <a:solidFill>
-              <a:srgbClr val="E3E1DA"/>
-            </a:solidFill>
-            <a:prstDash val="solid"/>
-          </a:ln>
-        </p:spPr>
-      </p:sp>
-      <p:sp>
-        <p:nvSpPr>
-          <p:cNvPr id="23" name="Shape 20"/>
-          <p:cNvSpPr/>
-          <p:nvPr/>
-        </p:nvSpPr>
-        <p:spPr>
-          <a:xfrm>
-            <a:off x="1015990" y="4635459"/>
-            <a:ext cx="482620" cy="482620"/>
-          </a:xfrm>
-          <a:prstGeom prst="ellipse">
-            <a:avLst/>
-          </a:prstGeom>
-          <a:solidFill>
-            <a:srgbClr val="A8441A"/>
-          </a:solidFill>
-          <a:ln/>
-        </p:spPr>
-      </p:sp>
-      <p:sp>
-        <p:nvSpPr>
-          <p:cNvPr id="24" name="Text 21"/>
-          <p:cNvSpPr txBox="1"/>
-          <p:nvPr/>
-        </p:nvSpPr>
-        <p:spPr>
-          <a:xfrm>
-            <a:off x="1015990" y="4635459"/>
-            <a:ext cx="482620" cy="482620"/>
-          </a:xfrm>
-          <a:prstGeom prst="rect">
-            <a:avLst/>
-          </a:prstGeom>
-          <a:noFill/>
-          <a:ln/>
-        </p:spPr>
-        <p:txBody>
-          <a:bodyPr wrap="square" lIns="0" tIns="0" rIns="0" bIns="0" rtlCol="0" anchor="ctr"/>
-          <a:lstStyle/>
-          <a:p>
-            <a:pPr marL="0" indent="0" algn="ctr">
-              <a:buNone/>
-            </a:pPr>
-            <a:r>
-              <a:rPr lang="en-US" sz="2000" b="1" dirty="0">
-                <a:solidFill>
-                  <a:srgbClr val="FFFFFF"/>
-                </a:solidFill>
-                <a:latin typeface="Consolas" pitchFamily="34" charset="0"/>
-                <a:ea typeface="Consolas" pitchFamily="34" charset="-122"/>
-                <a:cs typeface="Consolas" pitchFamily="34" charset="-120"/>
-              </a:rPr>
-              <a:t>5</a:t>
-            </a:r>
-            <a:endParaRPr lang="en-US" sz="2000" dirty="0"/>
-          </a:p>
-        </p:txBody>
-      </p:sp>
-      <p:sp>
-        <p:nvSpPr>
-          <p:cNvPr id="25" name="Text 22"/>
-          <p:cNvSpPr txBox="1"/>
-          <p:nvPr/>
-        </p:nvSpPr>
-        <p:spPr>
-          <a:xfrm>
-            <a:off x="1701790" y="4317980"/>
-            <a:ext cx="4089380" cy="1155710"/>
-          </a:xfrm>
-          <a:prstGeom prst="rect">
-            <a:avLst/>
-          </a:prstGeom>
-          <a:noFill/>
-          <a:ln/>
-        </p:spPr>
-        <p:txBody>
-          <a:bodyPr wrap="square" lIns="0" tIns="0" rIns="0" bIns="0" rtlCol="0" anchor="ctr"/>
-          <a:lstStyle/>
-          <a:p>
-            <a:pPr marL="0" indent="0">
-              <a:lnSpc>
-                <a:spcPct val="115000"/>
-              </a:lnSpc>
-              <a:buNone/>
-            </a:pPr>
-            <a:r>
-              <a:rPr lang="en-US" sz="1500" dirty="0">
-                <a:solidFill>
-                  <a:srgbClr val="1B2233"/>
-                </a:solidFill>
-                <a:latin typeface="Calibri" pitchFamily="34" charset="0"/>
-                <a:ea typeface="Calibri" pitchFamily="34" charset="-122"/>
-                <a:cs typeface="Calibri" pitchFamily="34" charset="-120"/>
-              </a:rPr>
-              <a:t>Keep knowledge apart from inference: one engine ran both animals and fever / flu.</a:t>
-            </a:r>
-            <a:endParaRPr lang="en-US" sz="1500" dirty="0"/>
-          </a:p>
-        </p:txBody>
-      </p:sp>
-      <p:sp>
-        <p:nvSpPr>
-          <p:cNvPr id="26" name="Shape 23"/>
-          <p:cNvSpPr/>
-          <p:nvPr/>
-        </p:nvSpPr>
-        <p:spPr>
-          <a:xfrm>
-            <a:off x="6197620" y="4317980"/>
-            <a:ext cx="5181630" cy="1155710"/>
-          </a:xfrm>
-          <a:prstGeom prst="roundRect">
-            <a:avLst>
-              <a:gd name="adj" fmla="val 7912"/>
-            </a:avLst>
-          </a:prstGeom>
-          <a:solidFill>
-            <a:srgbClr val="FFFFFF"/>
-          </a:solidFill>
-          <a:ln w="12700">
-            <a:solidFill>
-              <a:srgbClr val="E3E1DA"/>
-            </a:solidFill>
-            <a:prstDash val="solid"/>
-          </a:ln>
-        </p:spPr>
-      </p:sp>
-      <p:sp>
-        <p:nvSpPr>
-          <p:cNvPr id="27" name="Shape 24"/>
-          <p:cNvSpPr/>
-          <p:nvPr/>
-        </p:nvSpPr>
-        <p:spPr>
-          <a:xfrm>
-            <a:off x="6400800" y="4635459"/>
-            <a:ext cx="482620" cy="482620"/>
-          </a:xfrm>
-          <a:prstGeom prst="ellipse">
-            <a:avLst/>
-          </a:prstGeom>
-          <a:solidFill>
-            <a:srgbClr val="A8441A"/>
-          </a:solidFill>
-          <a:ln/>
-        </p:spPr>
-      </p:sp>
-      <p:sp>
-        <p:nvSpPr>
-          <p:cNvPr id="28" name="Text 25"/>
-          <p:cNvSpPr txBox="1"/>
-          <p:nvPr/>
-        </p:nvSpPr>
-        <p:spPr>
-          <a:xfrm>
-            <a:off x="6400800" y="4635459"/>
-            <a:ext cx="482620" cy="482620"/>
-          </a:xfrm>
-          <a:prstGeom prst="rect">
-            <a:avLst/>
-          </a:prstGeom>
-          <a:noFill/>
-          <a:ln/>
-        </p:spPr>
-        <p:txBody>
-          <a:bodyPr wrap="square" lIns="0" tIns="0" rIns="0" bIns="0" rtlCol="0" anchor="ctr"/>
-          <a:lstStyle/>
-          <a:p>
-            <a:pPr marL="0" indent="0" algn="ctr">
-              <a:buNone/>
-            </a:pPr>
-            <a:r>
-              <a:rPr lang="en-US" sz="2000" b="1" dirty="0">
-                <a:solidFill>
-                  <a:srgbClr val="FFFFFF"/>
-                </a:solidFill>
-                <a:latin typeface="Consolas" pitchFamily="34" charset="0"/>
-                <a:ea typeface="Consolas" pitchFamily="34" charset="-122"/>
-                <a:cs typeface="Consolas" pitchFamily="34" charset="-120"/>
-              </a:rPr>
-              <a:t>6</a:t>
-            </a:r>
-            <a:endParaRPr lang="en-US" sz="2000" dirty="0"/>
-          </a:p>
-        </p:txBody>
-      </p:sp>
-      <p:sp>
-        <p:nvSpPr>
-          <p:cNvPr id="29" name="Text 26"/>
-          <p:cNvSpPr txBox="1"/>
-          <p:nvPr/>
-        </p:nvSpPr>
-        <p:spPr>
-          <a:xfrm>
-            <a:off x="7086600" y="4317980"/>
-            <a:ext cx="4089380" cy="1155710"/>
-          </a:xfrm>
-          <a:prstGeom prst="rect">
-            <a:avLst/>
-          </a:prstGeom>
-          <a:noFill/>
-          <a:ln/>
-        </p:spPr>
-        <p:txBody>
-          <a:bodyPr wrap="square" lIns="0" tIns="0" rIns="0" bIns="0" rtlCol="0" anchor="ctr"/>
-          <a:lstStyle/>
-          <a:p>
-            <a:pPr marL="0" indent="0">
-              <a:lnSpc>
-                <a:spcPct val="115000"/>
-              </a:lnSpc>
-              <a:buNone/>
-            </a:pPr>
-            <a:r>
-              <a:rPr lang="en-US" sz="1500" dirty="0">
-                <a:solidFill>
-                  <a:srgbClr val="1B2233"/>
-                </a:solidFill>
-                <a:latin typeface="Calibri" pitchFamily="34" charset="0"/>
-                <a:ea typeface="Calibri" pitchFamily="34" charset="-122"/>
-                <a:cs typeface="Calibri" pitchFamily="34" charset="-120"/>
-              </a:rPr>
-              <a:t>Real systems show the power and the limits: acquisition, uncertainty and upkeep.</a:t>
-            </a:r>
-            <a:endParaRPr lang="en-US" sz="1500" dirty="0"/>
-          </a:p>
-        </p:txBody>
-      </p:sp>
-    </p:spTree>
-  </p:cSld>
-  <p:clrMapOvr>
-    <a:masterClrMapping/>
-  </p:clrMapOvr>
-</p:sld>
-</file>
-
-<file path=ppt/slides/slide31.xml><?xml version="1.0" encoding="utf-8"?>
-<p:sld xmlns:a="http://schemas.openxmlformats.org/drawingml/2006/main" xmlns:r="http://schemas.openxmlformats.org/officeDocument/2006/relationships" xmlns:p="http://schemas.openxmlformats.org/presentationml/2006/main">
   <p:cSld name="Slide 31">
     <p:bg>
       <p:bgPr>
@@ -26565,7 +25569,7 @@
 </p:sld>
 </file>
 
-<file path=ppt/slides/slide32.xml><?xml version="1.0" encoding="utf-8"?>
+<file path=ppt/slides/slide31.xml><?xml version="1.0" encoding="utf-8"?>
 <p:sld xmlns:a="http://schemas.openxmlformats.org/drawingml/2006/main" xmlns:r="http://schemas.openxmlformats.org/officeDocument/2006/relationships" xmlns:p="http://schemas.openxmlformats.org/presentationml/2006/main">
   <p:cSld name="Slide 32">
     <p:bg>
